--- a/docs/links-26/presentations/Short-Run-for-managers.pptx
+++ b/docs/links-26/presentations/Short-Run-for-managers.pptx
@@ -1546,7 +1546,7 @@
           <a:p>
             <a:r>
               <a:rPr lang="en-US" dirty="0"/>
-              <a:t>Days at work stay at 219 a year (218.6 exactly; Monday to Saturday; Sunday is overtime), under the ceiling agreed on 1 October 2026. Late finishes average about three more a year each, all of them from the December staffing — three to the close every day, where today’s weekdays have two — so no link meeting the same rules on 26 weeks could have fewer. Full weekends off are seven in 26 and never more than five weeks apart; nobody works more than five days in a row on the fixed rota; no week mixes earlies and lates, and 18 of the 21 working weeks keep one shift time. Weekly hours run from 24h 30m to 42h 30m, inside today’s 25h 10m to 43h 50m; only the average is the contract. The average shift is two minutes longer.</a:t>
+              <a:t>Days at work stay at 219 a year (218.6 exactly; Monday to Saturday; Sunday is overtime), under the ceiling agreed on 1 October 2026. Late finishes average about three more a year each, all of them from the December staffing — three to the close every day, where today’s weekdays have two — so no link meeting the same rules on 26 weeks could have fewer. Full weekends off are seven in 26 and never more than five weeks apart; nobody works more than five days in a row on the fixed rota; no week mixes earlies and lates, and 18 of the 21 working weeks keep one shift time. Weekly hours run from 24h 30m to 42h 30m, inside today’s 25h 10m to 43h 50m; only the average is the contract. The average shift is about two minutes longer.</a:t>
             </a:r>
             <a:endParaRPr lang="en-US" dirty="0"/>
           </a:p>
@@ -7607,7 +7607,7 @@
                 <a:ea typeface="Inter" pitchFamily="34" charset="-122"/>
                 <a:cs typeface="Inter" pitchFamily="34" charset="-120"/>
               </a:rPr>
-              <a:t>Average shift 2 minutes longer</a:t>
+              <a:t>Average shift about 2 minutes longer</a:t>
             </a:r>
             <a:endParaRPr lang="en-US" sz="1300" dirty="0"/>
           </a:p>

--- a/docs/links-26/presentations/Short-Run-for-managers.pptx
+++ b/docs/links-26/presentations/Short-Run-for-managers.pptx
@@ -1282,7 +1282,7 @@
           <a:p>
             <a:r>
               <a:rPr lang="en-US" dirty="0"/>
-              <a:t>Working weeks average exactly 35 hours Monday to Saturday — 44,100 minutes across the 21 working weeks — so no overtime is needed to balance the Monday-to-Saturday week. Individual weeks range from 24h 30m to 42h 30m, inside today’s 25h 10m to 43h 50m; only the average is the contract, as today. Five cover weeks keep about the same share of the link as today’s four in 20 (one week in 5.2, against one in 5). Sunday is not contracted, so the ten Sunday duties are worked as rest-day overtime, exactly as today’s eight are. The two extra Sunday overtime duties a week come from the Sunday staffing of ten, confirmed verbally — any link that meets the rules needs them. The 26-week link, its five cover weeks and the ceiling of 219 contracted days a year were agreed on 1 October 2026; Short Run gives 218.6.</a:t>
+              <a:t>Working weeks average exactly 35 hours Monday to Saturday — 44,100 minutes across the 21 working weeks — so no overtime is needed to balance the Monday-to-Saturday week. Individual weeks range from 24h 30m to 42h 30m — today’s run from 25h 10m to 43h 50m, so the heaviest is lighter than today’s heaviest and the lightest a little lighter than today’s lightest; only the average is the contract, as today. Five cover weeks keep about the same share of the link as today’s four in 20 (one week in 5.2, against one in 5). Sunday is not contracted, so the ten Sunday duties are worked as rest-day overtime, exactly as today’s eight are. The two extra Sunday overtime duties a week come from the Sunday staffing of ten, confirmed verbally — any link that meets the rules needs them. The 26-week link, its five cover weeks and the ceiling of 219 contracted days a year were agreed on 1 October 2026; Short Run gives 218.6.</a:t>
             </a:r>
             <a:endParaRPr lang="en-US" dirty="0"/>
           </a:p>
@@ -1458,7 +1458,7 @@
           <a:p>
             <a:r>
               <a:rPr lang="en-US" dirty="0"/>
-              <a:t>This is the case in one slide. It meets every December staffing rule and keeps the shift times people already work wherever that cost little — nine of its fifteen are worked today, and none on a Saturday is new. Nobody works more than five days in a row on the fixed rota, where today it is seven; a cover week placed badly can make it six, never more. Every working week is all earlies or all lates, and 18 of the 21 keep one shift time Monday to Friday, where today it is seven weeks in 16. Its seven full weekends off in 26 weeks are never more than five weeks apart, which is as close as the five cover weeks allow; today it is four in 20, up to seven weeks apart. The honest cost is late finishes, and it is the smallest one possible: the December staffing needs three to the close every day, and only those three finish after 23:00, so finishes at 23:00 or later go from about 39 to 42 a year each. Its heaviest week is 42h 30m, inside today’s range (today’s heaviest is 43h 50m). Every closing shift is 30 to 45 minutes shorter. Six shift times are new.</a:t>
+              <a:t>This is the case in one slide. It meets every December staffing rule and keeps the shift times people already work wherever that cost little — nine of its fifteen are worked today, and none on a Saturday is new. Nobody works more than five days in a row on the fixed rota, where today it is seven; a cover week placed badly can make it six, never more. Every working week is all earlies or all lates, and 18 of the 21 keep one shift time Monday to Friday, where today it is seven weeks in 16. Its seven full weekends off in 26 weeks are never more than five weeks apart, which is as close as the five cover weeks allow; today it is four in 20, up to seven weeks apart. The honest cost is late finishes, and it is the smallest one possible: the December staffing needs three to the close every day, and only those three finish after 23:00, so finishes at 23:00 or later go from about 39 to 42 a year each. Its heaviest week is 42h 30m, against today’s 43h 50m. Every closing shift is 30 to 45 minutes shorter. Six shift times are new.</a:t>
             </a:r>
             <a:endParaRPr lang="en-US" dirty="0"/>
           </a:p>
@@ -1546,7 +1546,7 @@
           <a:p>
             <a:r>
               <a:rPr lang="en-US" dirty="0"/>
-              <a:t>Days at work stay at 219 a year (218.6 exactly; Monday to Saturday; Sunday is overtime), under the ceiling agreed on 1 October 2026. Late finishes average about three more a year each, all of them from the December staffing — three to the close every day, where today’s weekdays have two — so no link meeting the same rules on 26 weeks could have fewer. Full weekends off are seven in 26 and never more than five weeks apart; nobody works more than five days in a row on the fixed rota; no week mixes earlies and lates, and 18 of the 21 working weeks keep one shift time. Weekly hours run from 24h 30m to 42h 30m, inside today’s 25h 10m to 43h 50m; only the average is the contract. The average shift is about two minutes longer.</a:t>
+              <a:t>Days at work stay at 219 a year (218.6 exactly; Monday to Saturday; Sunday is overtime), under the ceiling agreed on 1 October 2026. Late finishes average about three more a year each, all of them from the December staffing — three to the close every day, where today’s weekdays have two — so no link meeting the same rules on 26 weeks could have fewer. Full weekends off are seven in 26 and never more than five weeks apart; nobody works more than five days in a row on the fixed rota; no week mixes earlies and lates, and 18 of the 21 working weeks keep one shift time. Weekly hours run from 24h 30m to 42h 30m (today 25h 10m to 43h 50m); only the average is the contract. The average shift is about two minutes longer.</a:t>
             </a:r>
             <a:endParaRPr lang="en-US" dirty="0"/>
           </a:p>

--- a/docs/links-26/presentations/Short-Run-for-managers.pptx
+++ b/docs/links-26/presentations/Short-Run-for-managers.pptx
@@ -6380,7 +6380,7 @@
                 <a:ea typeface="Inter" pitchFamily="34" charset="-122"/>
                 <a:cs typeface="Inter" pitchFamily="34" charset="-120"/>
               </a:rPr>
-              <a:t>Never more than five days in a row, and the fewest late finishes the rules allow</a:t>
+              <a:t>No run over five days on the fixed rota, and the fewest late finishes the rules allow</a:t>
             </a:r>
             <a:endParaRPr lang="en-US" sz="1500" dirty="0"/>
           </a:p>
@@ -7368,7 +7368,7 @@
                 <a:ea typeface="Inter" pitchFamily="34" charset="-122"/>
                 <a:cs typeface="Inter" pitchFamily="34" charset="-120"/>
               </a:rPr>
-              <a:t>Never more than 5 days in a row (today 7)</a:t>
+              <a:t>Never more than 5 days in a row on the fixed rota (today 7)</a:t>
             </a:r>
             <a:endParaRPr lang="en-US" sz="1300" dirty="0"/>
           </a:p>

--- a/docs/links-26/presentations/Short-Run-for-managers.pptx
+++ b/docs/links-26/presentations/Short-Run-for-managers.pptx
@@ -4415,7 +4415,7 @@
                 <a:ea typeface="Inter" pitchFamily="34" charset="-122"/>
                 <a:cs typeface="Inter" pitchFamily="34" charset="-120"/>
               </a:rPr>
-              <a:t>Much closer to the December pattern on weekdays, Saturday and Sunday.</a:t>
+              <a:t>Much closer to the December pattern every day. The score: hour by hour, how far staffing sits from the trains; 0 would track them exactly.</a:t>
             </a:r>
             <a:endParaRPr lang="en-US" sz="1400" dirty="0"/>
           </a:p>
@@ -6380,7 +6380,7 @@
                 <a:ea typeface="Inter" pitchFamily="34" charset="-122"/>
                 <a:cs typeface="Inter" pitchFamily="34" charset="-120"/>
               </a:rPr>
-              <a:t>No run over five days on the fixed rota, and the fewest late finishes the rules allow</a:t>
+              <a:t>What every link in this pack gives, what this one adds, and what it costs</a:t>
             </a:r>
             <a:endParaRPr lang="en-US" sz="1500" dirty="0"/>
           </a:p>
@@ -6483,7 +6483,7 @@
                 <a:ea typeface="Inter" pitchFamily="34" charset="-122"/>
                 <a:cs typeface="Inter" pitchFamily="34" charset="-120"/>
               </a:rPr>
-              <a:t>Meets all 9 December rules, and all 3 flexible ones</a:t>
+              <a:t>Every link here: all 9 December rules and the 3 flexible ones; no fatigue warning</a:t>
             </a:r>
             <a:endParaRPr lang="en-US" sz="1500" dirty="0"/>
           </a:p>
@@ -6586,7 +6586,7 @@
                 <a:ea typeface="Inter" pitchFamily="34" charset="-122"/>
                 <a:cs typeface="Inter" pitchFamily="34" charset="-120"/>
               </a:rPr>
-              <a:t>Seven full weekends off in 26, never more than five weeks apart</a:t>
+              <a:t>Every link here: about 14 full weekends off a year (today 10), at most 5 apart</a:t>
             </a:r>
             <a:endParaRPr lang="en-US" sz="1500" dirty="0"/>
           </a:p>
@@ -6689,7 +6689,7 @@
                 <a:ea typeface="Inter" pitchFamily="34" charset="-122"/>
                 <a:cs typeface="Inter" pitchFamily="34" charset="-120"/>
               </a:rPr>
-              <a:t>Never more than 5 days in a row on the fixed rota — today 7</a:t>
+              <a:t>Every link here: no shift over 9 hours, and every closing shift shorter</a:t>
             </a:r>
             <a:endParaRPr lang="en-US" sz="1500" dirty="0"/>
           </a:p>
@@ -6792,7 +6792,7 @@
                 <a:ea typeface="Inter" pitchFamily="34" charset="-122"/>
                 <a:cs typeface="Inter" pitchFamily="34" charset="-120"/>
               </a:rPr>
-              <a:t>9 of its 15 shift times are worked today</a:t>
+              <a:t>This one adds: never more than 5 days in a row on the fixed rota (today 7)</a:t>
             </a:r>
             <a:endParaRPr lang="en-US" sz="1500" dirty="0"/>
           </a:p>
@@ -6895,7 +6895,7 @@
                 <a:ea typeface="Inter" pitchFamily="34" charset="-122"/>
                 <a:cs typeface="Inter" pitchFamily="34" charset="-120"/>
               </a:rPr>
-              <a:t>No shift over 9 hours, and every closing shift is shorter</a:t>
+              <a:t>9 of 15 shift times worked today; 6 new, four of them today’s lates starting later</a:t>
             </a:r>
             <a:endParaRPr lang="en-US" sz="1500" dirty="0"/>
           </a:p>
@@ -6959,7 +6959,7 @@
                 <a:ea typeface="Inter" pitchFamily="34" charset="-122"/>
                 <a:cs typeface="Inter" pitchFamily="34" charset="-120"/>
               </a:rPr>
-              <a:t>✓</a:t>
+              <a:t>–</a:t>
             </a:r>
             <a:endParaRPr lang="en-US" sz="1200" dirty="0"/>
           </a:p>
@@ -6998,7 +6998,7 @@
                 <a:ea typeface="Inter" pitchFamily="34" charset="-122"/>
                 <a:cs typeface="Inter" pitchFamily="34" charset="-120"/>
               </a:rPr>
-              <a:t>No avoidable fatigue warnings in the fixed rota</a:t>
+              <a:t>Costs: one 42h 30m week (today up to 43h 50m); four weeks off 15 days, not 14</a:t>
             </a:r>
             <a:endParaRPr lang="en-US" sz="1500" dirty="0"/>
           </a:p>
@@ -7064,7 +7064,7 @@
                 <a:ea typeface="Inter" pitchFamily="34" charset="-122"/>
                 <a:cs typeface="Inter" pitchFamily="34" charset="-120"/>
               </a:rPr>
-              <a:t>The trade-off: three more late finishes a year each (42, today 39) — the rules’ minimum.</a:t>
+              <a:t>Late finishes: 42 a year each (today 39) — the rules’ minimum. The colleague deck shows every cost openly.</a:t>
             </a:r>
             <a:endParaRPr lang="en-US" sz="1400" dirty="0"/>
           </a:p>
@@ -7347,7 +7347,7 @@
                 <a:ea typeface="Inter" pitchFamily="34" charset="-122"/>
                 <a:cs typeface="Inter" pitchFamily="34" charset="-120"/>
               </a:rPr>
-              <a:t>7 weekends off, at most 5 weeks apart</a:t>
+              <a:t>14 full weekends off a year (today 10), at most 5 apart</a:t>
             </a:r>
             <a:endParaRPr lang="en-US" sz="1300" dirty="0"/>
           </a:p>

--- a/docs/links-26/presentations/Short-Run-for-managers.pptx
+++ b/docs/links-26/presentations/Short-Run-for-managers.pptx
@@ -5323,7 +5323,7 @@
                 <a:ea typeface="Inter" pitchFamily="34" charset="-122"/>
                 <a:cs typeface="Inter" pitchFamily="34" charset="-120"/>
               </a:rPr>
-              <a:t>Six more people, 35 hours a week on average — Sundays still rely on overtime.</a:t>
+              <a:t>Six more people, 35 hours a week on average; Sunday overtime 83h 30m a week across the link (today 68h 15m).</a:t>
             </a:r>
             <a:endParaRPr lang="en-US" sz="1400" dirty="0"/>
           </a:p>
@@ -7864,7 +7864,7 @@
                 <a:ea typeface="Inter" pitchFamily="34" charset="-122"/>
                 <a:cs typeface="Inter" pitchFamily="34" charset="-120"/>
               </a:rPr>
-              <a:t>Three things confirmed verbally (29 Sep and 1 Oct 2026), two decisions left</a:t>
+              <a:t>Three things confirmed verbally, two decisions left, two points still open</a:t>
             </a:r>
             <a:endParaRPr lang="en-US" sz="1500" dirty="0"/>
           </a:p>
@@ -8574,7 +8574,7 @@
                 <a:ea typeface="Inter" pitchFamily="34" charset="-122"/>
                 <a:cs typeface="Inter" pitchFamily="34" charset="-120"/>
               </a:rPr>
-              <a:t>Who begins on which week of the link.</a:t>
+              <a:t>Who begins on which week. Open: the 13-day limit’s written source; the FF19 reading.</a:t>
             </a:r>
             <a:endParaRPr lang="en-US" sz="1300" dirty="0"/>
           </a:p>

--- a/docs/links-26/presentations/Short-Run-for-managers.pptx
+++ b/docs/links-26/presentations/Short-Run-for-managers.pptx
@@ -1194,7 +1194,7 @@
           <a:p>
             <a:r>
               <a:rPr lang="en-US" dirty="0"/>
-              <a:t>The figure compares, hour by hour, the share of the day’s floor staff on duty with the share of the day’s train service, each train weighted by its length. 0 would be a perfect match. It is a guide to shape, not a staffing requirement — the rules on the previous slide are the requirement. Against today’s link, Short Run’s score is a little over half on weekdays, about a fifth on a Saturday and about two-fifths on a Sunday; lower is closer.</a:t>
+              <a:t>The figure compares, hour by hour, the share of the day’s floor staff on duty with the share of the day’s train service, each train weighted by its length. 0 would be a perfect match. It is a guide to shape, not a staffing requirement — the rules on the previous slide are the requirement. Against today’s link, Short Run’s score is a little over half on weekdays, about a fifth on a Saturday and about two-fifths on a Sunday; lower is closer. The score is a measure of the day’s shape only — not a staffing requirement or a passenger forecast.</a:t>
             </a:r>
             <a:endParaRPr lang="en-US" dirty="0"/>
           </a:p>
@@ -1370,7 +1370,7 @@
           <a:p>
             <a:r>
               <a:rPr lang="en-US" dirty="0"/>
-              <a:t>The ORR factors are good practice, not pass/fail limits, and this is not a fatigue risk assessment. Two factors — early starts at a 06:20 station and a weekly rotation — come with every weekly link, so they are recorded on the proposal sheet for information and not counted. One definition, successive start times varying by more than two hours, is counted on our reading and should be confirmed by whoever assesses it.</a:t>
+              <a:t>The ORR factors are good practice, not pass/fail limits, and this is not a fatigue risk assessment. Two factors — early starts at a 06:20 station and a weekly rotation — come with every weekly link, so they are recorded on the proposal sheet for information and not counted. One definition, successive start times varying by more than two hours, is counted on our reading and should be confirmed by whoever assesses it. Early starts and a weekly rotation come with every link, so they are not counted. The written source of the 13-day limit is still to be confirmed.</a:t>
             </a:r>
             <a:endParaRPr lang="en-US" dirty="0"/>
           </a:p>
@@ -2774,7 +2774,7 @@
                 <a:ea typeface="Inter" pitchFamily="34" charset="-122"/>
                 <a:cs typeface="Inter" pitchFamily="34" charset="-120"/>
               </a:rPr>
-              <a:t>contract rostered exactly, on average</a:t>
+              <a:t>contracted hours a week</a:t>
             </a:r>
             <a:endParaRPr lang="en-US" sz="1500" dirty="0"/>
           </a:p>
@@ -2813,7 +2813,7 @@
                 <a:ea typeface="Inter" pitchFamily="34" charset="-122"/>
                 <a:cs typeface="Inter" pitchFamily="34" charset="-120"/>
               </a:rPr>
-              <a:t>Monday to Saturday</a:t>
+              <a:t>rostered exactly, Mon–Sat average</a:t>
             </a:r>
             <a:endParaRPr lang="en-US" sz="1300" dirty="0"/>
           </a:p>
@@ -4423,45 +4423,6 @@
       </p:sp>
       <p:sp>
         <p:nvSpPr>
-          <p:cNvPr id="7" name="Text 4"/>
-          <p:cNvSpPr txBox="1"/>
-          <p:nvPr/>
-        </p:nvSpPr>
-        <p:spPr>
-          <a:xfrm>
-            <a:off x="4023360" y="4754880"/>
-            <a:ext cx="4663440" cy="310896"/>
-          </a:xfrm>
-          <a:prstGeom prst="rect">
-            <a:avLst/>
-          </a:prstGeom>
-          <a:noFill/>
-          <a:ln/>
-        </p:spPr>
-        <p:txBody>
-          <a:bodyPr wrap="square" lIns="0" tIns="0" rIns="0" bIns="0" rtlCol="0" anchor="t"/>
-          <a:lstStyle/>
-          <a:p>
-            <a:pPr algn="r" indent="0" marL="0">
-              <a:buNone/>
-            </a:pPr>
-            <a:r>
-              <a:rPr lang="en-US" sz="850" i="1" dirty="0">
-                <a:solidFill>
-                  <a:srgbClr val="5B6778"/>
-                </a:solidFill>
-                <a:latin typeface="Inter" pitchFamily="34" charset="0"/>
-                <a:ea typeface="Inter" pitchFamily="34" charset="-122"/>
-                <a:cs typeface="Inter" pitchFamily="34" charset="-120"/>
-              </a:rPr>
-              <a:t>A measure of the day’s shape only — not a staffing requirement or a passenger forecast.</a:t>
-            </a:r>
-            <a:endParaRPr lang="en-US" sz="850" dirty="0"/>
-          </a:p>
-        </p:txBody>
-      </p:sp>
-      <p:sp>
-        <p:nvSpPr>
           <p:cNvPr id="8" name="Text 5"/>
           <p:cNvSpPr txBox="1"/>
           <p:nvPr/>
@@ -6195,45 +6156,6 @@
               <a:t>Rest and run limits met with room to spare; no avoidable fatigue warnings in the fixed rota.</a:t>
             </a:r>
             <a:endParaRPr lang="en-US" sz="1400" dirty="0"/>
-          </a:p>
-        </p:txBody>
-      </p:sp>
-      <p:sp>
-        <p:nvSpPr>
-          <p:cNvPr id="24" name="Text 22"/>
-          <p:cNvSpPr txBox="1"/>
-          <p:nvPr/>
-        </p:nvSpPr>
-        <p:spPr>
-          <a:xfrm>
-            <a:off x="4023360" y="4754880"/>
-            <a:ext cx="4663440" cy="310896"/>
-          </a:xfrm>
-          <a:prstGeom prst="rect">
-            <a:avLst/>
-          </a:prstGeom>
-          <a:noFill/>
-          <a:ln/>
-        </p:spPr>
-        <p:txBody>
-          <a:bodyPr wrap="square" lIns="0" tIns="0" rIns="0" bIns="0" rtlCol="0" anchor="t"/>
-          <a:lstStyle/>
-          <a:p>
-            <a:pPr algn="r" indent="0" marL="0">
-              <a:buNone/>
-            </a:pPr>
-            <a:r>
-              <a:rPr lang="en-US" sz="850" i="1" dirty="0">
-                <a:solidFill>
-                  <a:srgbClr val="5B6778"/>
-                </a:solidFill>
-                <a:latin typeface="Inter" pitchFamily="34" charset="0"/>
-                <a:ea typeface="Inter" pitchFamily="34" charset="-122"/>
-                <a:cs typeface="Inter" pitchFamily="34" charset="-120"/>
-              </a:rPr>
-              <a:t>Early starts and a weekly rotation come with every link, so are not counted. The written source of the 13-day limit is still to be confirmed.</a:t>
-            </a:r>
-            <a:endParaRPr lang="en-US" sz="850" dirty="0"/>
           </a:p>
         </p:txBody>
       </p:sp>

--- a/docs/links-26/presentations/Short-Run-for-managers.pptx
+++ b/docs/links-26/presentations/Short-Run-for-managers.pptx
@@ -5035,7 +5035,7 @@
                 <a:ea typeface="Inter" pitchFamily="34" charset="-122"/>
                 <a:cs typeface="Inter" pitchFamily="34" charset="-120"/>
               </a:rPr>
-              <a:t>4 — 1 week in 5</a:t>
+              <a:t>4 in 20 (1 in 5)</a:t>
             </a:r>
             <a:endParaRPr lang="en-US" sz="1600" dirty="0"/>
           </a:p>
@@ -5074,7 +5074,7 @@
                 <a:ea typeface="Inter" pitchFamily="34" charset="-122"/>
                 <a:cs typeface="Inter" pitchFamily="34" charset="-120"/>
               </a:rPr>
-              <a:t>5 — 1 week in 5</a:t>
+              <a:t>5 in 26 (1 in 5.2)</a:t>
             </a:r>
             <a:endParaRPr lang="en-US" sz="1800" dirty="0"/>
           </a:p>
@@ -6302,7 +6302,7 @@
                 <a:ea typeface="Inter" pitchFamily="34" charset="-122"/>
                 <a:cs typeface="Inter" pitchFamily="34" charset="-120"/>
               </a:rPr>
-              <a:t>What every link in this pack gives, what this one adds, and what it costs</a:t>
+              <a:t>What all three shortlisted links give, what this one adds, and what it costs</a:t>
             </a:r>
             <a:endParaRPr lang="en-US" sz="1500" dirty="0"/>
           </a:p>
@@ -6405,7 +6405,7 @@
                 <a:ea typeface="Inter" pitchFamily="34" charset="-122"/>
                 <a:cs typeface="Inter" pitchFamily="34" charset="-120"/>
               </a:rPr>
-              <a:t>Every link here: all 9 December rules and the 3 flexible ones; no fatigue warning</a:t>
+              <a:t>All three shortlisted: all 9 December rules and the 3 flexible ones; no fatigue warning</a:t>
             </a:r>
             <a:endParaRPr lang="en-US" sz="1500" dirty="0"/>
           </a:p>
@@ -6508,7 +6508,7 @@
                 <a:ea typeface="Inter" pitchFamily="34" charset="-122"/>
                 <a:cs typeface="Inter" pitchFamily="34" charset="-120"/>
               </a:rPr>
-              <a:t>Every link here: about 14 full weekends off a year (today 10), at most 5 apart</a:t>
+              <a:t>All three shortlisted: about 14 full weekends off a year (today 10), at most 5 apart</a:t>
             </a:r>
             <a:endParaRPr lang="en-US" sz="1500" dirty="0"/>
           </a:p>
@@ -6611,7 +6611,7 @@
                 <a:ea typeface="Inter" pitchFamily="34" charset="-122"/>
                 <a:cs typeface="Inter" pitchFamily="34" charset="-120"/>
               </a:rPr>
-              <a:t>Every link here: no shift over 9 hours, and every closing shift shorter</a:t>
+              <a:t>All three shortlisted: no shift over 9 hours, and every closing shift shorter</a:t>
             </a:r>
             <a:endParaRPr lang="en-US" sz="1500" dirty="0"/>
           </a:p>
@@ -6817,7 +6817,7 @@
                 <a:ea typeface="Inter" pitchFamily="34" charset="-122"/>
                 <a:cs typeface="Inter" pitchFamily="34" charset="-120"/>
               </a:rPr>
-              <a:t>9 of 15 shift times worked today; 6 new, four of them today’s lates starting later</a:t>
+              <a:t>9 of 15 shift times worked today; 6 new, several shorter versions of today’s lates</a:t>
             </a:r>
             <a:endParaRPr lang="en-US" sz="1500" dirty="0"/>
           </a:p>

--- a/docs/links-26/presentations/Short-Run-for-managers.pptx
+++ b/docs/links-26/presentations/Short-Run-for-managers.pptx
@@ -2319,6 +2319,7 @@
                 <a:spcPts val="800"/>
               </a:spcAft>
               <a:buSzPct val="100000"/>
+              <a:buFont typeface="Inter" pitchFamily="34" charset="0"/>
               <a:buChar char="•"/>
             </a:pPr>
             <a:r>
@@ -2340,6 +2341,7 @@
                 <a:spcPts val="800"/>
               </a:spcAft>
               <a:buSzPct val="100000"/>
+              <a:buFont typeface="Inter" pitchFamily="34" charset="0"/>
               <a:buChar char="•"/>
             </a:pPr>
             <a:r>
@@ -2361,6 +2363,7 @@
                 <a:spcPts val="800"/>
               </a:spcAft>
               <a:buSzPct val="100000"/>
+              <a:buFont typeface="Inter" pitchFamily="34" charset="0"/>
               <a:buChar char="•"/>
             </a:pPr>
             <a:r>
@@ -2603,8 +2606,8 @@
         </p:nvSpPr>
         <p:spPr>
           <a:xfrm>
-            <a:off x="594360" y="2560320"/>
-            <a:ext cx="1600200" cy="640080"/>
+            <a:off x="525780" y="2560320"/>
+            <a:ext cx="1737360" cy="640080"/>
           </a:xfrm>
           <a:prstGeom prst="rect">
             <a:avLst/>
@@ -2628,7 +2631,19 @@
                 <a:ea typeface="Inter" pitchFamily="34" charset="-122"/>
                 <a:cs typeface="Inter" pitchFamily="34" charset="-120"/>
               </a:rPr>
-              <a:t>December rules met</a:t>
+              <a:t>December</a:t>
+            </a:r>
+            <a:br/>
+            <a:r>
+              <a:rPr lang="en-US" sz="1500" b="1" dirty="0">
+                <a:solidFill>
+                  <a:srgbClr val="1B2533"/>
+                </a:solidFill>
+                <a:latin typeface="Inter" pitchFamily="34" charset="0"/>
+                <a:ea typeface="Inter" pitchFamily="34" charset="-122"/>
+                <a:cs typeface="Inter" pitchFamily="34" charset="-120"/>
+              </a:rPr>
+              <a:t>rules met</a:t>
             </a:r>
             <a:endParaRPr lang="en-US" sz="1500" dirty="0"/>
           </a:p>
@@ -2642,8 +2657,8 @@
         </p:nvSpPr>
         <p:spPr>
           <a:xfrm>
-            <a:off x="594360" y="3200400"/>
-            <a:ext cx="1600200" cy="457200"/>
+            <a:off x="525780" y="3200400"/>
+            <a:ext cx="1737360" cy="457200"/>
           </a:xfrm>
           <a:prstGeom prst="rect">
             <a:avLst/>
@@ -2749,8 +2764,8 @@
         </p:nvSpPr>
         <p:spPr>
           <a:xfrm>
-            <a:off x="2697480" y="2560320"/>
-            <a:ext cx="1600200" cy="640080"/>
+            <a:off x="2628900" y="2560320"/>
+            <a:ext cx="1737360" cy="640080"/>
           </a:xfrm>
           <a:prstGeom prst="rect">
             <a:avLst/>
@@ -2774,7 +2789,19 @@
                 <a:ea typeface="Inter" pitchFamily="34" charset="-122"/>
                 <a:cs typeface="Inter" pitchFamily="34" charset="-120"/>
               </a:rPr>
-              <a:t>contracted hours a week</a:t>
+              <a:t>contracted hours</a:t>
+            </a:r>
+            <a:br/>
+            <a:r>
+              <a:rPr lang="en-US" sz="1500" b="1" dirty="0">
+                <a:solidFill>
+                  <a:srgbClr val="1B2533"/>
+                </a:solidFill>
+                <a:latin typeface="Inter" pitchFamily="34" charset="0"/>
+                <a:ea typeface="Inter" pitchFamily="34" charset="-122"/>
+                <a:cs typeface="Inter" pitchFamily="34" charset="-120"/>
+              </a:rPr>
+              <a:t>a week</a:t>
             </a:r>
             <a:endParaRPr lang="en-US" sz="1500" dirty="0"/>
           </a:p>
@@ -2788,8 +2815,8 @@
         </p:nvSpPr>
         <p:spPr>
           <a:xfrm>
-            <a:off x="2697480" y="3200400"/>
-            <a:ext cx="1600200" cy="457200"/>
+            <a:off x="2628900" y="3200400"/>
+            <a:ext cx="1737360" cy="457200"/>
           </a:xfrm>
           <a:prstGeom prst="rect">
             <a:avLst/>
@@ -2813,7 +2840,7 @@
                 <a:ea typeface="Inter" pitchFamily="34" charset="-122"/>
                 <a:cs typeface="Inter" pitchFamily="34" charset="-120"/>
               </a:rPr>
-              <a:t>rostered exactly, Mon–Sat average</a:t>
+              <a:t>Mon–Sat average</a:t>
             </a:r>
             <a:endParaRPr lang="en-US" sz="1300" dirty="0"/>
           </a:p>
@@ -2895,8 +2922,8 @@
         </p:nvSpPr>
         <p:spPr>
           <a:xfrm>
-            <a:off x="4800600" y="2560320"/>
-            <a:ext cx="1600200" cy="640080"/>
+            <a:off x="4732020" y="2560320"/>
+            <a:ext cx="1737360" cy="640080"/>
           </a:xfrm>
           <a:prstGeom prst="rect">
             <a:avLst/>
@@ -2920,7 +2947,19 @@
                 <a:ea typeface="Inter" pitchFamily="34" charset="-122"/>
                 <a:cs typeface="Inter" pitchFamily="34" charset="-120"/>
               </a:rPr>
-              <a:t>avoidable fatigue warnings</a:t>
+              <a:t>avoidable</a:t>
+            </a:r>
+            <a:br/>
+            <a:r>
+              <a:rPr lang="en-US" sz="1500" b="1" dirty="0">
+                <a:solidFill>
+                  <a:srgbClr val="1B2533"/>
+                </a:solidFill>
+                <a:latin typeface="Inter" pitchFamily="34" charset="0"/>
+                <a:ea typeface="Inter" pitchFamily="34" charset="-122"/>
+                <a:cs typeface="Inter" pitchFamily="34" charset="-120"/>
+              </a:rPr>
+              <a:t>fatigue warnings</a:t>
             </a:r>
             <a:endParaRPr lang="en-US" sz="1500" dirty="0"/>
           </a:p>
@@ -2934,8 +2973,8 @@
         </p:nvSpPr>
         <p:spPr>
           <a:xfrm>
-            <a:off x="4800600" y="3200400"/>
-            <a:ext cx="1600200" cy="457200"/>
+            <a:off x="4732020" y="3200400"/>
+            <a:ext cx="1737360" cy="457200"/>
           </a:xfrm>
           <a:prstGeom prst="rect">
             <a:avLst/>
@@ -2959,7 +2998,7 @@
                 <a:ea typeface="Inter" pitchFamily="34" charset="-122"/>
                 <a:cs typeface="Inter" pitchFamily="34" charset="-120"/>
               </a:rPr>
-              <a:t>in the fixed rota · today 4</a:t>
+              <a:t>fixed rota · today 4</a:t>
             </a:r>
             <a:endParaRPr lang="en-US" sz="1300" dirty="0"/>
           </a:p>
@@ -3041,8 +3080,8 @@
         </p:nvSpPr>
         <p:spPr>
           <a:xfrm>
-            <a:off x="6903720" y="2560320"/>
-            <a:ext cx="1600200" cy="640080"/>
+            <a:off x="6835140" y="2560320"/>
+            <a:ext cx="1737360" cy="640080"/>
           </a:xfrm>
           <a:prstGeom prst="rect">
             <a:avLst/>
@@ -3066,7 +3105,19 @@
                 <a:ea typeface="Inter" pitchFamily="34" charset="-122"/>
                 <a:cs typeface="Inter" pitchFamily="34" charset="-120"/>
               </a:rPr>
-              <a:t>people on the link</a:t>
+              <a:t>people</a:t>
+            </a:r>
+            <a:br/>
+            <a:r>
+              <a:rPr lang="en-US" sz="1500" b="1" dirty="0">
+                <a:solidFill>
+                  <a:srgbClr val="1B2533"/>
+                </a:solidFill>
+                <a:latin typeface="Inter" pitchFamily="34" charset="0"/>
+                <a:ea typeface="Inter" pitchFamily="34" charset="-122"/>
+                <a:cs typeface="Inter" pitchFamily="34" charset="-120"/>
+              </a:rPr>
+              <a:t>on the link</a:t>
             </a:r>
             <a:endParaRPr lang="en-US" sz="1500" dirty="0"/>
           </a:p>
@@ -3080,8 +3131,8 @@
         </p:nvSpPr>
         <p:spPr>
           <a:xfrm>
-            <a:off x="6903720" y="3200400"/>
-            <a:ext cx="1600200" cy="457200"/>
+            <a:off x="6835140" y="3200400"/>
+            <a:ext cx="1737360" cy="457200"/>
           </a:xfrm>
           <a:prstGeom prst="rect">
             <a:avLst/>
@@ -3210,7 +3261,7 @@
                 <a:ea typeface="Inter" pitchFamily="34" charset="-122"/>
                 <a:cs typeface="Inter" pitchFamily="34" charset="-120"/>
               </a:rPr>
-              <a:t>Short Run · December 2026 CEA link · for managers · 2</a:t>
+              <a:t>Short Run · December 2026 link proposal · for managers · 2</a:t>
             </a:r>
             <a:endParaRPr lang="en-US" sz="900" dirty="0"/>
           </a:p>
@@ -3334,8 +3385,8 @@
         </p:nvSpPr>
         <p:spPr>
           <a:xfrm>
-            <a:off x="4297680" y="1417320"/>
-            <a:ext cx="2194560" cy="320040"/>
+            <a:off x="4663440" y="1417320"/>
+            <a:ext cx="2011680" cy="320040"/>
           </a:xfrm>
           <a:prstGeom prst="rect">
             <a:avLst/>
@@ -3373,8 +3424,8 @@
         </p:nvSpPr>
         <p:spPr>
           <a:xfrm>
-            <a:off x="6492240" y="1417320"/>
-            <a:ext cx="2194560" cy="320040"/>
+            <a:off x="6675120" y="1417320"/>
+            <a:ext cx="2011680" cy="320040"/>
           </a:xfrm>
           <a:prstGeom prst="rect">
             <a:avLst/>
@@ -3440,7 +3491,7 @@
         <p:spPr>
           <a:xfrm>
             <a:off x="640080" y="1801368"/>
-            <a:ext cx="3657600" cy="365760"/>
+            <a:ext cx="4023360" cy="365760"/>
           </a:xfrm>
           <a:prstGeom prst="rect">
             <a:avLst/>
@@ -3478,8 +3529,8 @@
         </p:nvSpPr>
         <p:spPr>
           <a:xfrm>
-            <a:off x="4297680" y="1801368"/>
-            <a:ext cx="2194560" cy="365760"/>
+            <a:off x="4663440" y="1801368"/>
+            <a:ext cx="2011680" cy="365760"/>
           </a:xfrm>
           <a:prstGeom prst="rect">
             <a:avLst/>
@@ -3517,8 +3568,8 @@
         </p:nvSpPr>
         <p:spPr>
           <a:xfrm>
-            <a:off x="6492240" y="1801368"/>
-            <a:ext cx="2194560" cy="365760"/>
+            <a:off x="6675120" y="1801368"/>
+            <a:ext cx="2011680" cy="365760"/>
           </a:xfrm>
           <a:prstGeom prst="rect">
             <a:avLst/>
@@ -3556,7 +3607,7 @@
         </p:nvSpPr>
         <p:spPr>
           <a:xfrm>
-            <a:off x="457200" y="2258568"/>
+            <a:off x="457200" y="2240280"/>
             <a:ext cx="8229600" cy="365760"/>
           </a:xfrm>
           <a:prstGeom prst="roundRect">
@@ -3583,8 +3634,8 @@
         </p:nvSpPr>
         <p:spPr>
           <a:xfrm>
-            <a:off x="640080" y="2258568"/>
-            <a:ext cx="3657600" cy="365760"/>
+            <a:off x="640080" y="2240280"/>
+            <a:ext cx="4023360" cy="365760"/>
           </a:xfrm>
           <a:prstGeom prst="rect">
             <a:avLst/>
@@ -3622,8 +3673,8 @@
         </p:nvSpPr>
         <p:spPr>
           <a:xfrm>
-            <a:off x="4297680" y="2258568"/>
-            <a:ext cx="2194560" cy="365760"/>
+            <a:off x="4663440" y="2240280"/>
+            <a:ext cx="2011680" cy="365760"/>
           </a:xfrm>
           <a:prstGeom prst="rect">
             <a:avLst/>
@@ -3661,8 +3712,8 @@
         </p:nvSpPr>
         <p:spPr>
           <a:xfrm>
-            <a:off x="6492240" y="2258568"/>
-            <a:ext cx="2194560" cy="365760"/>
+            <a:off x="6675120" y="2240280"/>
+            <a:ext cx="2011680" cy="365760"/>
           </a:xfrm>
           <a:prstGeom prst="rect">
             <a:avLst/>
@@ -3700,7 +3751,7 @@
         </p:nvSpPr>
         <p:spPr>
           <a:xfrm>
-            <a:off x="457200" y="2715768"/>
+            <a:off x="457200" y="2679192"/>
             <a:ext cx="8229600" cy="365760"/>
           </a:xfrm>
           <a:prstGeom prst="roundRect">
@@ -3727,8 +3778,8 @@
         </p:nvSpPr>
         <p:spPr>
           <a:xfrm>
-            <a:off x="640080" y="2715768"/>
-            <a:ext cx="3657600" cy="365760"/>
+            <a:off x="640080" y="2679192"/>
+            <a:ext cx="4023360" cy="365760"/>
           </a:xfrm>
           <a:prstGeom prst="rect">
             <a:avLst/>
@@ -3766,8 +3817,8 @@
         </p:nvSpPr>
         <p:spPr>
           <a:xfrm>
-            <a:off x="4297680" y="2715768"/>
-            <a:ext cx="2194560" cy="365760"/>
+            <a:off x="4663440" y="2679192"/>
+            <a:ext cx="2011680" cy="365760"/>
           </a:xfrm>
           <a:prstGeom prst="rect">
             <a:avLst/>
@@ -3805,8 +3856,8 @@
         </p:nvSpPr>
         <p:spPr>
           <a:xfrm>
-            <a:off x="6492240" y="2715768"/>
-            <a:ext cx="2194560" cy="365760"/>
+            <a:off x="6675120" y="2679192"/>
+            <a:ext cx="2011680" cy="365760"/>
           </a:xfrm>
           <a:prstGeom prst="rect">
             <a:avLst/>
@@ -3844,7 +3895,7 @@
         </p:nvSpPr>
         <p:spPr>
           <a:xfrm>
-            <a:off x="457200" y="3172968"/>
+            <a:off x="457200" y="3118104"/>
             <a:ext cx="8229600" cy="365760"/>
           </a:xfrm>
           <a:prstGeom prst="roundRect">
@@ -3871,8 +3922,8 @@
         </p:nvSpPr>
         <p:spPr>
           <a:xfrm>
-            <a:off x="640080" y="3172968"/>
-            <a:ext cx="3657600" cy="365760"/>
+            <a:off x="640080" y="3118104"/>
+            <a:ext cx="4023360" cy="365760"/>
           </a:xfrm>
           <a:prstGeom prst="rect">
             <a:avLst/>
@@ -3910,8 +3961,8 @@
         </p:nvSpPr>
         <p:spPr>
           <a:xfrm>
-            <a:off x="4297680" y="3172968"/>
-            <a:ext cx="2194560" cy="365760"/>
+            <a:off x="4663440" y="3118104"/>
+            <a:ext cx="2011680" cy="365760"/>
           </a:xfrm>
           <a:prstGeom prst="rect">
             <a:avLst/>
@@ -3949,8 +4000,8 @@
         </p:nvSpPr>
         <p:spPr>
           <a:xfrm>
-            <a:off x="6492240" y="3172968"/>
-            <a:ext cx="2194560" cy="365760"/>
+            <a:off x="6675120" y="3118104"/>
+            <a:ext cx="2011680" cy="365760"/>
           </a:xfrm>
           <a:prstGeom prst="rect">
             <a:avLst/>
@@ -3988,7 +4039,7 @@
         </p:nvSpPr>
         <p:spPr>
           <a:xfrm>
-            <a:off x="457200" y="3630168"/>
+            <a:off x="457200" y="3557016"/>
             <a:ext cx="8229600" cy="365760"/>
           </a:xfrm>
           <a:prstGeom prst="roundRect">
@@ -4015,8 +4066,8 @@
         </p:nvSpPr>
         <p:spPr>
           <a:xfrm>
-            <a:off x="640080" y="3630168"/>
-            <a:ext cx="3657600" cy="365760"/>
+            <a:off x="640080" y="3557016"/>
+            <a:ext cx="4023360" cy="365760"/>
           </a:xfrm>
           <a:prstGeom prst="rect">
             <a:avLst/>
@@ -4054,8 +4105,8 @@
         </p:nvSpPr>
         <p:spPr>
           <a:xfrm>
-            <a:off x="4297680" y="3630168"/>
-            <a:ext cx="2194560" cy="365760"/>
+            <a:off x="4663440" y="3557016"/>
+            <a:ext cx="2011680" cy="365760"/>
           </a:xfrm>
           <a:prstGeom prst="rect">
             <a:avLst/>
@@ -4093,8 +4144,8 @@
         </p:nvSpPr>
         <p:spPr>
           <a:xfrm>
-            <a:off x="6492240" y="3630168"/>
-            <a:ext cx="2194560" cy="365760"/>
+            <a:off x="6675120" y="3557016"/>
+            <a:ext cx="2011680" cy="365760"/>
           </a:xfrm>
           <a:prstGeom prst="rect">
             <a:avLst/>
@@ -4223,7 +4274,7 @@
                 <a:ea typeface="Inter" pitchFamily="34" charset="-122"/>
                 <a:cs typeface="Inter" pitchFamily="34" charset="-120"/>
               </a:rPr>
-              <a:t>Short Run · December 2026 CEA link · for managers · 3</a:t>
+              <a:t>Short Run · December 2026 link proposal · for managers · 3</a:t>
             </a:r>
             <a:endParaRPr lang="en-US" sz="900" dirty="0"/>
           </a:p>
@@ -4454,7 +4505,7 @@
                 <a:ea typeface="Inter" pitchFamily="34" charset="-122"/>
                 <a:cs typeface="Inter" pitchFamily="34" charset="-120"/>
               </a:rPr>
-              <a:t>Short Run · December 2026 CEA link · for managers · 4</a:t>
+              <a:t>Short Run · December 2026 link proposal · for managers · 4</a:t>
             </a:r>
             <a:endParaRPr lang="en-US" sz="900" dirty="0"/>
           </a:p>
@@ -4578,8 +4629,8 @@
         </p:nvSpPr>
         <p:spPr>
           <a:xfrm>
-            <a:off x="4297680" y="1417320"/>
-            <a:ext cx="2194560" cy="320040"/>
+            <a:off x="4663440" y="1417320"/>
+            <a:ext cx="2011680" cy="320040"/>
           </a:xfrm>
           <a:prstGeom prst="rect">
             <a:avLst/>
@@ -4617,8 +4668,8 @@
         </p:nvSpPr>
         <p:spPr>
           <a:xfrm>
-            <a:off x="6492240" y="1417320"/>
-            <a:ext cx="2194560" cy="320040"/>
+            <a:off x="6675120" y="1417320"/>
+            <a:ext cx="2011680" cy="320040"/>
           </a:xfrm>
           <a:prstGeom prst="rect">
             <a:avLst/>
@@ -4657,7 +4708,7 @@
         <p:spPr>
           <a:xfrm>
             <a:off x="457200" y="1801368"/>
-            <a:ext cx="8229600" cy="475488"/>
+            <a:ext cx="8229600" cy="365760"/>
           </a:xfrm>
           <a:prstGeom prst="roundRect">
             <a:avLst>
@@ -4684,7 +4735,7 @@
         <p:spPr>
           <a:xfrm>
             <a:off x="640080" y="1801368"/>
-            <a:ext cx="3657600" cy="475488"/>
+            <a:ext cx="4023360" cy="365760"/>
           </a:xfrm>
           <a:prstGeom prst="rect">
             <a:avLst/>
@@ -4722,8 +4773,8 @@
         </p:nvSpPr>
         <p:spPr>
           <a:xfrm>
-            <a:off x="4297680" y="1801368"/>
-            <a:ext cx="2194560" cy="475488"/>
+            <a:off x="4663440" y="1801368"/>
+            <a:ext cx="2011680" cy="365760"/>
           </a:xfrm>
           <a:prstGeom prst="rect">
             <a:avLst/>
@@ -4761,8 +4812,8 @@
         </p:nvSpPr>
         <p:spPr>
           <a:xfrm>
-            <a:off x="6492240" y="1801368"/>
-            <a:ext cx="2194560" cy="475488"/>
+            <a:off x="6675120" y="1801368"/>
+            <a:ext cx="2011680" cy="365760"/>
           </a:xfrm>
           <a:prstGeom prst="rect">
             <a:avLst/>
@@ -4800,8 +4851,8 @@
         </p:nvSpPr>
         <p:spPr>
           <a:xfrm>
-            <a:off x="457200" y="2368296"/>
-            <a:ext cx="8229600" cy="475488"/>
+            <a:off x="457200" y="2240280"/>
+            <a:ext cx="8229600" cy="365760"/>
           </a:xfrm>
           <a:prstGeom prst="roundRect">
             <a:avLst>
@@ -4827,8 +4878,8 @@
         </p:nvSpPr>
         <p:spPr>
           <a:xfrm>
-            <a:off x="640080" y="2368296"/>
-            <a:ext cx="3657600" cy="475488"/>
+            <a:off x="640080" y="2240280"/>
+            <a:ext cx="4023360" cy="365760"/>
           </a:xfrm>
           <a:prstGeom prst="rect">
             <a:avLst/>
@@ -4866,8 +4917,8 @@
         </p:nvSpPr>
         <p:spPr>
           <a:xfrm>
-            <a:off x="4297680" y="2368296"/>
-            <a:ext cx="2194560" cy="475488"/>
+            <a:off x="4663440" y="2240280"/>
+            <a:ext cx="2011680" cy="365760"/>
           </a:xfrm>
           <a:prstGeom prst="rect">
             <a:avLst/>
@@ -4905,8 +4956,8 @@
         </p:nvSpPr>
         <p:spPr>
           <a:xfrm>
-            <a:off x="6492240" y="2368296"/>
-            <a:ext cx="2194560" cy="475488"/>
+            <a:off x="6675120" y="2240280"/>
+            <a:ext cx="2011680" cy="365760"/>
           </a:xfrm>
           <a:prstGeom prst="rect">
             <a:avLst/>
@@ -4944,8 +4995,8 @@
         </p:nvSpPr>
         <p:spPr>
           <a:xfrm>
-            <a:off x="457200" y="2935224"/>
-            <a:ext cx="8229600" cy="475488"/>
+            <a:off x="457200" y="2679192"/>
+            <a:ext cx="8229600" cy="365760"/>
           </a:xfrm>
           <a:prstGeom prst="roundRect">
             <a:avLst>
@@ -4971,8 +5022,8 @@
         </p:nvSpPr>
         <p:spPr>
           <a:xfrm>
-            <a:off x="640080" y="2935224"/>
-            <a:ext cx="3657600" cy="475488"/>
+            <a:off x="640080" y="2679192"/>
+            <a:ext cx="4023360" cy="365760"/>
           </a:xfrm>
           <a:prstGeom prst="rect">
             <a:avLst/>
@@ -5010,8 +5061,8 @@
         </p:nvSpPr>
         <p:spPr>
           <a:xfrm>
-            <a:off x="4297680" y="2935224"/>
-            <a:ext cx="2194560" cy="475488"/>
+            <a:off x="4663440" y="2679192"/>
+            <a:ext cx="2011680" cy="365760"/>
           </a:xfrm>
           <a:prstGeom prst="rect">
             <a:avLst/>
@@ -5049,8 +5100,8 @@
         </p:nvSpPr>
         <p:spPr>
           <a:xfrm>
-            <a:off x="6492240" y="2935224"/>
-            <a:ext cx="2194560" cy="475488"/>
+            <a:off x="6675120" y="2679192"/>
+            <a:ext cx="2011680" cy="365760"/>
           </a:xfrm>
           <a:prstGeom prst="rect">
             <a:avLst/>
@@ -5088,8 +5139,8 @@
         </p:nvSpPr>
         <p:spPr>
           <a:xfrm>
-            <a:off x="457200" y="3502152"/>
-            <a:ext cx="8229600" cy="475488"/>
+            <a:off x="457200" y="3118104"/>
+            <a:ext cx="8229600" cy="365760"/>
           </a:xfrm>
           <a:prstGeom prst="roundRect">
             <a:avLst>
@@ -5115,8 +5166,8 @@
         </p:nvSpPr>
         <p:spPr>
           <a:xfrm>
-            <a:off x="640080" y="3502152"/>
-            <a:ext cx="3657600" cy="475488"/>
+            <a:off x="640080" y="3118104"/>
+            <a:ext cx="4023360" cy="365760"/>
           </a:xfrm>
           <a:prstGeom prst="rect">
             <a:avLst/>
@@ -5154,8 +5205,8 @@
         </p:nvSpPr>
         <p:spPr>
           <a:xfrm>
-            <a:off x="4297680" y="3502152"/>
-            <a:ext cx="2194560" cy="475488"/>
+            <a:off x="4663440" y="3118104"/>
+            <a:ext cx="2011680" cy="365760"/>
           </a:xfrm>
           <a:prstGeom prst="rect">
             <a:avLst/>
@@ -5193,8 +5244,8 @@
         </p:nvSpPr>
         <p:spPr>
           <a:xfrm>
-            <a:off x="6492240" y="3502152"/>
-            <a:ext cx="2194560" cy="475488"/>
+            <a:off x="6675120" y="3118104"/>
+            <a:ext cx="2011680" cy="365760"/>
           </a:xfrm>
           <a:prstGeom prst="rect">
             <a:avLst/>
@@ -5323,7 +5374,7 @@
                 <a:ea typeface="Inter" pitchFamily="34" charset="-122"/>
                 <a:cs typeface="Inter" pitchFamily="34" charset="-120"/>
               </a:rPr>
-              <a:t>Short Run · December 2026 CEA link · for managers · 5</a:t>
+              <a:t>Short Run · December 2026 link proposal · for managers · 5</a:t>
             </a:r>
             <a:endParaRPr lang="en-US" sz="900" dirty="0"/>
           </a:p>
@@ -5447,8 +5498,8 @@
         </p:nvSpPr>
         <p:spPr>
           <a:xfrm>
-            <a:off x="4297680" y="1417320"/>
-            <a:ext cx="2194560" cy="320040"/>
+            <a:off x="4663440" y="1417320"/>
+            <a:ext cx="2011680" cy="320040"/>
           </a:xfrm>
           <a:prstGeom prst="rect">
             <a:avLst/>
@@ -5486,8 +5537,8 @@
         </p:nvSpPr>
         <p:spPr>
           <a:xfrm>
-            <a:off x="6492240" y="1417320"/>
-            <a:ext cx="2194560" cy="320040"/>
+            <a:off x="6675120" y="1417320"/>
+            <a:ext cx="2011680" cy="320040"/>
           </a:xfrm>
           <a:prstGeom prst="rect">
             <a:avLst/>
@@ -5526,7 +5577,7 @@
         <p:spPr>
           <a:xfrm>
             <a:off x="457200" y="1801368"/>
-            <a:ext cx="8229600" cy="475488"/>
+            <a:ext cx="8229600" cy="365760"/>
           </a:xfrm>
           <a:prstGeom prst="roundRect">
             <a:avLst>
@@ -5553,7 +5604,7 @@
         <p:spPr>
           <a:xfrm>
             <a:off x="640080" y="1801368"/>
-            <a:ext cx="3657600" cy="475488"/>
+            <a:ext cx="4023360" cy="365760"/>
           </a:xfrm>
           <a:prstGeom prst="rect">
             <a:avLst/>
@@ -5591,8 +5642,8 @@
         </p:nvSpPr>
         <p:spPr>
           <a:xfrm>
-            <a:off x="4297680" y="1801368"/>
-            <a:ext cx="2194560" cy="475488"/>
+            <a:off x="4663440" y="1801368"/>
+            <a:ext cx="2011680" cy="365760"/>
           </a:xfrm>
           <a:prstGeom prst="rect">
             <a:avLst/>
@@ -5630,8 +5681,8 @@
         </p:nvSpPr>
         <p:spPr>
           <a:xfrm>
-            <a:off x="6492240" y="1801368"/>
-            <a:ext cx="2194560" cy="475488"/>
+            <a:off x="6675120" y="1801368"/>
+            <a:ext cx="2011680" cy="365760"/>
           </a:xfrm>
           <a:prstGeom prst="rect">
             <a:avLst/>
@@ -5669,8 +5720,8 @@
         </p:nvSpPr>
         <p:spPr>
           <a:xfrm>
-            <a:off x="457200" y="2368296"/>
-            <a:ext cx="8229600" cy="475488"/>
+            <a:off x="457200" y="2240280"/>
+            <a:ext cx="8229600" cy="365760"/>
           </a:xfrm>
           <a:prstGeom prst="roundRect">
             <a:avLst>
@@ -5696,8 +5747,8 @@
         </p:nvSpPr>
         <p:spPr>
           <a:xfrm>
-            <a:off x="640080" y="2368296"/>
-            <a:ext cx="3657600" cy="475488"/>
+            <a:off x="640080" y="2240280"/>
+            <a:ext cx="4023360" cy="365760"/>
           </a:xfrm>
           <a:prstGeom prst="rect">
             <a:avLst/>
@@ -5735,8 +5786,8 @@
         </p:nvSpPr>
         <p:spPr>
           <a:xfrm>
-            <a:off x="4297680" y="2368296"/>
-            <a:ext cx="2194560" cy="475488"/>
+            <a:off x="4663440" y="2240280"/>
+            <a:ext cx="2011680" cy="365760"/>
           </a:xfrm>
           <a:prstGeom prst="rect">
             <a:avLst/>
@@ -5774,8 +5825,8 @@
         </p:nvSpPr>
         <p:spPr>
           <a:xfrm>
-            <a:off x="6492240" y="2368296"/>
-            <a:ext cx="2194560" cy="475488"/>
+            <a:off x="6675120" y="2240280"/>
+            <a:ext cx="2011680" cy="365760"/>
           </a:xfrm>
           <a:prstGeom prst="rect">
             <a:avLst/>
@@ -5813,8 +5864,8 @@
         </p:nvSpPr>
         <p:spPr>
           <a:xfrm>
-            <a:off x="457200" y="2935224"/>
-            <a:ext cx="8229600" cy="475488"/>
+            <a:off x="457200" y="2679192"/>
+            <a:ext cx="8229600" cy="365760"/>
           </a:xfrm>
           <a:prstGeom prst="roundRect">
             <a:avLst>
@@ -5840,8 +5891,8 @@
         </p:nvSpPr>
         <p:spPr>
           <a:xfrm>
-            <a:off x="640080" y="2935224"/>
-            <a:ext cx="3657600" cy="475488"/>
+            <a:off x="640080" y="2679192"/>
+            <a:ext cx="4023360" cy="365760"/>
           </a:xfrm>
           <a:prstGeom prst="rect">
             <a:avLst/>
@@ -5879,8 +5930,8 @@
         </p:nvSpPr>
         <p:spPr>
           <a:xfrm>
-            <a:off x="4297680" y="2935224"/>
-            <a:ext cx="2194560" cy="475488"/>
+            <a:off x="4663440" y="2679192"/>
+            <a:ext cx="2011680" cy="365760"/>
           </a:xfrm>
           <a:prstGeom prst="rect">
             <a:avLst/>
@@ -5918,8 +5969,8 @@
         </p:nvSpPr>
         <p:spPr>
           <a:xfrm>
-            <a:off x="6492240" y="2935224"/>
-            <a:ext cx="2194560" cy="475488"/>
+            <a:off x="6675120" y="2679192"/>
+            <a:ext cx="2011680" cy="365760"/>
           </a:xfrm>
           <a:prstGeom prst="rect">
             <a:avLst/>
@@ -5957,8 +6008,8 @@
         </p:nvSpPr>
         <p:spPr>
           <a:xfrm>
-            <a:off x="457200" y="3502152"/>
-            <a:ext cx="8229600" cy="475488"/>
+            <a:off x="457200" y="3118104"/>
+            <a:ext cx="8229600" cy="365760"/>
           </a:xfrm>
           <a:prstGeom prst="roundRect">
             <a:avLst>
@@ -5984,8 +6035,8 @@
         </p:nvSpPr>
         <p:spPr>
           <a:xfrm>
-            <a:off x="640080" y="3502152"/>
-            <a:ext cx="3657600" cy="475488"/>
+            <a:off x="640080" y="3118104"/>
+            <a:ext cx="4023360" cy="365760"/>
           </a:xfrm>
           <a:prstGeom prst="rect">
             <a:avLst/>
@@ -6023,8 +6074,8 @@
         </p:nvSpPr>
         <p:spPr>
           <a:xfrm>
-            <a:off x="4297680" y="3502152"/>
-            <a:ext cx="2194560" cy="475488"/>
+            <a:off x="4663440" y="3118104"/>
+            <a:ext cx="2011680" cy="365760"/>
           </a:xfrm>
           <a:prstGeom prst="rect">
             <a:avLst/>
@@ -6062,8 +6113,8 @@
         </p:nvSpPr>
         <p:spPr>
           <a:xfrm>
-            <a:off x="6492240" y="3502152"/>
-            <a:ext cx="2194560" cy="475488"/>
+            <a:off x="6675120" y="3118104"/>
+            <a:ext cx="2011680" cy="365760"/>
           </a:xfrm>
           <a:prstGeom prst="rect">
             <a:avLst/>
@@ -6192,7 +6243,7 @@
                 <a:ea typeface="Inter" pitchFamily="34" charset="-122"/>
                 <a:cs typeface="Inter" pitchFamily="34" charset="-120"/>
               </a:rPr>
-              <a:t>Short Run · December 2026 CEA link · for managers · 6</a:t>
+              <a:t>Short Run · December 2026 link proposal · for managers · 6</a:t>
             </a:r>
             <a:endParaRPr lang="en-US" sz="900" dirty="0"/>
           </a:p>
@@ -6405,7 +6456,7 @@
                 <a:ea typeface="Inter" pitchFamily="34" charset="-122"/>
                 <a:cs typeface="Inter" pitchFamily="34" charset="-120"/>
               </a:rPr>
-              <a:t>All three shortlisted: all 9 December rules and the 3 flexible ones; no fatigue warning</a:t>
+              <a:t>All three shortlisted: all 9 December rules, all 3 flexible ones, no fatigue warning</a:t>
             </a:r>
             <a:endParaRPr lang="en-US" sz="1500" dirty="0"/>
           </a:p>
@@ -6419,7 +6470,7 @@
         </p:nvSpPr>
         <p:spPr>
           <a:xfrm>
-            <a:off x="457200" y="1728216"/>
+            <a:off x="457200" y="1783080"/>
             <a:ext cx="292608" cy="292608"/>
           </a:xfrm>
           <a:prstGeom prst="ellipse">
@@ -6444,7 +6495,7 @@
         </p:nvSpPr>
         <p:spPr>
           <a:xfrm>
-            <a:off x="457200" y="1728216"/>
+            <a:off x="457200" y="1783080"/>
             <a:ext cx="292608" cy="292608"/>
           </a:xfrm>
           <a:prstGeom prst="rect">
@@ -6483,7 +6534,7 @@
         </p:nvSpPr>
         <p:spPr>
           <a:xfrm>
-            <a:off x="914400" y="1709928"/>
+            <a:off x="914400" y="1764792"/>
             <a:ext cx="7772400" cy="329184"/>
           </a:xfrm>
           <a:prstGeom prst="rect">
@@ -6522,7 +6573,7 @@
         </p:nvSpPr>
         <p:spPr>
           <a:xfrm>
-            <a:off x="457200" y="2130552"/>
+            <a:off x="457200" y="2240280"/>
             <a:ext cx="292608" cy="292608"/>
           </a:xfrm>
           <a:prstGeom prst="ellipse">
@@ -6547,7 +6598,7 @@
         </p:nvSpPr>
         <p:spPr>
           <a:xfrm>
-            <a:off x="457200" y="2130552"/>
+            <a:off x="457200" y="2240280"/>
             <a:ext cx="292608" cy="292608"/>
           </a:xfrm>
           <a:prstGeom prst="rect">
@@ -6586,7 +6637,7 @@
         </p:nvSpPr>
         <p:spPr>
           <a:xfrm>
-            <a:off x="914400" y="2112264"/>
+            <a:off x="914400" y="2221992"/>
             <a:ext cx="7772400" cy="329184"/>
           </a:xfrm>
           <a:prstGeom prst="rect">
@@ -6625,7 +6676,7 @@
         </p:nvSpPr>
         <p:spPr>
           <a:xfrm>
-            <a:off x="457200" y="2532888"/>
+            <a:off x="457200" y="2697480"/>
             <a:ext cx="292608" cy="292608"/>
           </a:xfrm>
           <a:prstGeom prst="ellipse">
@@ -6650,7 +6701,7 @@
         </p:nvSpPr>
         <p:spPr>
           <a:xfrm>
-            <a:off x="457200" y="2532888"/>
+            <a:off x="457200" y="2697480"/>
             <a:ext cx="292608" cy="292608"/>
           </a:xfrm>
           <a:prstGeom prst="rect">
@@ -6689,7 +6740,7 @@
         </p:nvSpPr>
         <p:spPr>
           <a:xfrm>
-            <a:off x="914400" y="2514600"/>
+            <a:off x="914400" y="2679192"/>
             <a:ext cx="7772400" cy="329184"/>
           </a:xfrm>
           <a:prstGeom prst="rect">
@@ -6728,7 +6779,7 @@
         </p:nvSpPr>
         <p:spPr>
           <a:xfrm>
-            <a:off x="457200" y="2935224"/>
+            <a:off x="457200" y="3154680"/>
             <a:ext cx="292608" cy="292608"/>
           </a:xfrm>
           <a:prstGeom prst="ellipse">
@@ -6753,7 +6804,7 @@
         </p:nvSpPr>
         <p:spPr>
           <a:xfrm>
-            <a:off x="457200" y="2935224"/>
+            <a:off x="457200" y="3154680"/>
             <a:ext cx="292608" cy="292608"/>
           </a:xfrm>
           <a:prstGeom prst="rect">
@@ -6792,7 +6843,7 @@
         </p:nvSpPr>
         <p:spPr>
           <a:xfrm>
-            <a:off x="914400" y="2916936"/>
+            <a:off x="914400" y="3136392"/>
             <a:ext cx="7772400" cy="329184"/>
           </a:xfrm>
           <a:prstGeom prst="rect">
@@ -6831,7 +6882,7 @@
         </p:nvSpPr>
         <p:spPr>
           <a:xfrm>
-            <a:off x="457200" y="3337560"/>
+            <a:off x="457200" y="3611880"/>
             <a:ext cx="292608" cy="292608"/>
           </a:xfrm>
           <a:prstGeom prst="ellipse">
@@ -6856,7 +6907,7 @@
         </p:nvSpPr>
         <p:spPr>
           <a:xfrm>
-            <a:off x="457200" y="3337560"/>
+            <a:off x="457200" y="3611880"/>
             <a:ext cx="292608" cy="292608"/>
           </a:xfrm>
           <a:prstGeom prst="rect">
@@ -6895,7 +6946,7 @@
         </p:nvSpPr>
         <p:spPr>
           <a:xfrm>
-            <a:off x="914400" y="3319272"/>
+            <a:off x="914400" y="3593592"/>
             <a:ext cx="7772400" cy="329184"/>
           </a:xfrm>
           <a:prstGeom prst="rect">
@@ -7025,7 +7076,7 @@
                 <a:ea typeface="Inter" pitchFamily="34" charset="-122"/>
                 <a:cs typeface="Inter" pitchFamily="34" charset="-120"/>
               </a:rPr>
-              <a:t>Short Run · December 2026 CEA link · for managers · 7</a:t>
+              <a:t>Short Run · December 2026 link proposal · for managers · 7</a:t>
             </a:r>
             <a:endParaRPr lang="en-US" sz="900" dirty="0"/>
           </a:p>
@@ -7241,7 +7292,7 @@
         <p:spPr>
           <a:xfrm>
             <a:off x="731520" y="1901952"/>
-            <a:ext cx="3611880" cy="2011680"/>
+            <a:ext cx="3657600" cy="2011680"/>
           </a:xfrm>
           <a:prstGeom prst="rect">
             <a:avLst/>
@@ -7255,9 +7306,10 @@
           <a:p>
             <a:pPr marL="152400" indent="-152400">
               <a:spcAft>
-                <a:spcPts val="600"/>
+                <a:spcPts val="1000"/>
               </a:spcAft>
               <a:buSzPct val="100000"/>
+              <a:buFont typeface="Inter" pitchFamily="34" charset="0"/>
               <a:buChar char="•"/>
             </a:pPr>
             <a:r>
@@ -7269,16 +7321,17 @@
                 <a:ea typeface="Inter" pitchFamily="34" charset="-122"/>
                 <a:cs typeface="Inter" pitchFamily="34" charset="-120"/>
               </a:rPr>
-              <a:t>14 full weekends off a year (today 10), at most 5 apart</a:t>
+              <a:t>14 full weekends off a year (today 10)</a:t>
             </a:r>
             <a:endParaRPr lang="en-US" sz="1300" dirty="0"/>
           </a:p>
           <a:p>
             <a:pPr marL="152400" indent="-152400">
               <a:spcAft>
-                <a:spcPts val="600"/>
+                <a:spcPts val="1000"/>
               </a:spcAft>
               <a:buSzPct val="100000"/>
+              <a:buFont typeface="Inter" pitchFamily="34" charset="0"/>
               <a:buChar char="•"/>
             </a:pPr>
             <a:r>
@@ -7290,16 +7343,17 @@
                 <a:ea typeface="Inter" pitchFamily="34" charset="-122"/>
                 <a:cs typeface="Inter" pitchFamily="34" charset="-120"/>
               </a:rPr>
-              <a:t>Never more than 5 days in a row on the fixed rota (today 7)</a:t>
+              <a:t>At most 5 days in a row, fixed rota (today 7)</a:t>
             </a:r>
             <a:endParaRPr lang="en-US" sz="1300" dirty="0"/>
           </a:p>
           <a:p>
             <a:pPr marL="152400" indent="-152400">
               <a:spcAft>
-                <a:spcPts val="600"/>
+                <a:spcPts val="1000"/>
               </a:spcAft>
               <a:buSzPct val="100000"/>
+              <a:buFont typeface="Inter" pitchFamily="34" charset="0"/>
               <a:buChar char="•"/>
             </a:pPr>
             <a:r>
@@ -7311,16 +7365,17 @@
                 <a:ea typeface="Inter" pitchFamily="34" charset="-122"/>
                 <a:cs typeface="Inter" pitchFamily="34" charset="-120"/>
               </a:rPr>
-              <a:t>One shift time in 18 of 21 weeks (today 7 of 16)</a:t>
+              <a:t>One turn in 18 of 21 weeks (today 7 of 16)</a:t>
             </a:r>
             <a:endParaRPr lang="en-US" sz="1300" dirty="0"/>
           </a:p>
           <a:p>
             <a:pPr marL="152400" indent="-152400">
               <a:spcAft>
-                <a:spcPts val="600"/>
+                <a:spcPts val="1000"/>
               </a:spcAft>
               <a:buSzPct val="100000"/>
+              <a:buFont typeface="Inter" pitchFamily="34" charset="0"/>
               <a:buChar char="•"/>
             </a:pPr>
             <a:r>
@@ -7339,9 +7394,10 @@
           <a:p>
             <a:pPr marL="152400" indent="-152400">
               <a:spcAft>
-                <a:spcPts val="600"/>
+                <a:spcPts val="1000"/>
               </a:spcAft>
               <a:buSzPct val="100000"/>
+              <a:buFont typeface="Inter" pitchFamily="34" charset="0"/>
               <a:buChar char="•"/>
             </a:pPr>
             <a:r>
@@ -7459,7 +7515,7 @@
         <p:spPr>
           <a:xfrm>
             <a:off x="4937760" y="1901952"/>
-            <a:ext cx="3611880" cy="2011680"/>
+            <a:ext cx="3657600" cy="2011680"/>
           </a:xfrm>
           <a:prstGeom prst="rect">
             <a:avLst/>
@@ -7473,9 +7529,10 @@
           <a:p>
             <a:pPr marL="152400" indent="-152400">
               <a:spcAft>
-                <a:spcPts val="600"/>
+                <a:spcPts val="1000"/>
               </a:spcAft>
               <a:buSzPct val="100000"/>
+              <a:buFont typeface="Inter" pitchFamily="34" charset="0"/>
               <a:buChar char="•"/>
             </a:pPr>
             <a:r>
@@ -7494,9 +7551,10 @@
           <a:p>
             <a:pPr marL="152400" indent="-152400">
               <a:spcAft>
-                <a:spcPts val="600"/>
+                <a:spcPts val="1000"/>
               </a:spcAft>
               <a:buSzPct val="100000"/>
+              <a:buFont typeface="Inter" pitchFamily="34" charset="0"/>
               <a:buChar char="•"/>
             </a:pPr>
             <a:r>
@@ -7515,9 +7573,10 @@
           <a:p>
             <a:pPr marL="152400" indent="-152400">
               <a:spcAft>
-                <a:spcPts val="600"/>
+                <a:spcPts val="1000"/>
               </a:spcAft>
               <a:buSzPct val="100000"/>
+              <a:buFont typeface="Inter" pitchFamily="34" charset="0"/>
               <a:buChar char="•"/>
             </a:pPr>
             <a:r>
@@ -7536,9 +7595,10 @@
           <a:p>
             <a:pPr marL="152400" indent="-152400">
               <a:spcAft>
-                <a:spcPts val="600"/>
+                <a:spcPts val="1000"/>
               </a:spcAft>
               <a:buSzPct val="100000"/>
+              <a:buFont typeface="Inter" pitchFamily="34" charset="0"/>
               <a:buChar char="•"/>
             </a:pPr>
             <a:r>
@@ -7557,9 +7617,10 @@
           <a:p>
             <a:pPr marL="152400" indent="-152400">
               <a:spcAft>
-                <a:spcPts val="600"/>
+                <a:spcPts val="1000"/>
               </a:spcAft>
               <a:buSzPct val="100000"/>
+              <a:buFont typeface="Inter" pitchFamily="34" charset="0"/>
               <a:buChar char="•"/>
             </a:pPr>
             <a:r>
@@ -7571,7 +7632,7 @@
                 <a:ea typeface="Inter" pitchFamily="34" charset="-122"/>
                 <a:cs typeface="Inter" pitchFamily="34" charset="-120"/>
               </a:rPr>
-              <a:t>Four weeks off takes 15 days’ leave at best, not 14</a:t>
+              <a:t>Four weeks off needs 15 days’ leave, not 14</a:t>
             </a:r>
             <a:endParaRPr lang="en-US" sz="1300" dirty="0"/>
           </a:p>
@@ -7676,7 +7737,7 @@
                 <a:ea typeface="Inter" pitchFamily="34" charset="-122"/>
                 <a:cs typeface="Inter" pitchFamily="34" charset="-120"/>
               </a:rPr>
-              <a:t>Short Run · December 2026 CEA link · for managers · 8</a:t>
+              <a:t>Short Run · December 2026 link proposal · for managers · 8</a:t>
             </a:r>
             <a:endParaRPr lang="en-US" sz="900" dirty="0"/>
           </a:p>
@@ -7942,7 +8003,7 @@
         </p:nvSpPr>
         <p:spPr>
           <a:xfrm>
-            <a:off x="457200" y="1965960"/>
+            <a:off x="457200" y="1874520"/>
             <a:ext cx="457200" cy="457200"/>
           </a:xfrm>
           <a:prstGeom prst="ellipse">
@@ -7967,7 +8028,7 @@
         </p:nvSpPr>
         <p:spPr>
           <a:xfrm>
-            <a:off x="457200" y="1965960"/>
+            <a:off x="457200" y="1874520"/>
             <a:ext cx="457200" cy="457200"/>
           </a:xfrm>
           <a:prstGeom prst="rect">
@@ -8006,7 +8067,7 @@
         </p:nvSpPr>
         <p:spPr>
           <a:xfrm>
-            <a:off x="1097280" y="1929384"/>
+            <a:off x="1097280" y="1837944"/>
             <a:ext cx="7589520" cy="292608"/>
           </a:xfrm>
           <a:prstGeom prst="rect">
@@ -8045,7 +8106,7 @@
         </p:nvSpPr>
         <p:spPr>
           <a:xfrm>
-            <a:off x="1097280" y="2212848"/>
+            <a:off x="1097280" y="2121408"/>
             <a:ext cx="7589520" cy="274320"/>
           </a:xfrm>
           <a:prstGeom prst="rect">
@@ -8084,7 +8145,7 @@
         </p:nvSpPr>
         <p:spPr>
           <a:xfrm>
-            <a:off x="457200" y="2606040"/>
+            <a:off x="457200" y="2423160"/>
             <a:ext cx="457200" cy="457200"/>
           </a:xfrm>
           <a:prstGeom prst="ellipse">
@@ -8109,7 +8170,7 @@
         </p:nvSpPr>
         <p:spPr>
           <a:xfrm>
-            <a:off x="457200" y="2606040"/>
+            <a:off x="457200" y="2423160"/>
             <a:ext cx="457200" cy="457200"/>
           </a:xfrm>
           <a:prstGeom prst="rect">
@@ -8148,7 +8209,7 @@
         </p:nvSpPr>
         <p:spPr>
           <a:xfrm>
-            <a:off x="1097280" y="2569464"/>
+            <a:off x="1097280" y="2386584"/>
             <a:ext cx="7589520" cy="292608"/>
           </a:xfrm>
           <a:prstGeom prst="rect">
@@ -8187,7 +8248,7 @@
         </p:nvSpPr>
         <p:spPr>
           <a:xfrm>
-            <a:off x="1097280" y="2852928"/>
+            <a:off x="1097280" y="2670048"/>
             <a:ext cx="7589520" cy="274320"/>
           </a:xfrm>
           <a:prstGeom prst="rect">
@@ -8226,7 +8287,7 @@
         </p:nvSpPr>
         <p:spPr>
           <a:xfrm>
-            <a:off x="457200" y="3246120"/>
+            <a:off x="457200" y="2971800"/>
             <a:ext cx="457200" cy="457200"/>
           </a:xfrm>
           <a:prstGeom prst="ellipse">
@@ -8251,7 +8312,7 @@
         </p:nvSpPr>
         <p:spPr>
           <a:xfrm>
-            <a:off x="457200" y="3246120"/>
+            <a:off x="457200" y="2971800"/>
             <a:ext cx="457200" cy="457200"/>
           </a:xfrm>
           <a:prstGeom prst="rect">
@@ -8290,7 +8351,7 @@
         </p:nvSpPr>
         <p:spPr>
           <a:xfrm>
-            <a:off x="1097280" y="3209544"/>
+            <a:off x="1097280" y="2935224"/>
             <a:ext cx="7589520" cy="292608"/>
           </a:xfrm>
           <a:prstGeom prst="rect">
@@ -8329,7 +8390,7 @@
         </p:nvSpPr>
         <p:spPr>
           <a:xfrm>
-            <a:off x="1097280" y="3493008"/>
+            <a:off x="1097280" y="3218688"/>
             <a:ext cx="7589520" cy="274320"/>
           </a:xfrm>
           <a:prstGeom prst="rect">
@@ -8368,7 +8429,7 @@
         </p:nvSpPr>
         <p:spPr>
           <a:xfrm>
-            <a:off x="457200" y="3886200"/>
+            <a:off x="457200" y="3520440"/>
             <a:ext cx="457200" cy="457200"/>
           </a:xfrm>
           <a:prstGeom prst="ellipse">
@@ -8393,7 +8454,7 @@
         </p:nvSpPr>
         <p:spPr>
           <a:xfrm>
-            <a:off x="457200" y="3886200"/>
+            <a:off x="457200" y="3520440"/>
             <a:ext cx="457200" cy="457200"/>
           </a:xfrm>
           <a:prstGeom prst="rect">
@@ -8432,7 +8493,7 @@
         </p:nvSpPr>
         <p:spPr>
           <a:xfrm>
-            <a:off x="1097280" y="3849624"/>
+            <a:off x="1097280" y="3483864"/>
             <a:ext cx="7589520" cy="292608"/>
           </a:xfrm>
           <a:prstGeom prst="rect">
@@ -8471,7 +8532,7 @@
         </p:nvSpPr>
         <p:spPr>
           <a:xfrm>
-            <a:off x="1097280" y="4133088"/>
+            <a:off x="1097280" y="3767328"/>
             <a:ext cx="7589520" cy="274320"/>
           </a:xfrm>
           <a:prstGeom prst="rect">
@@ -8499,6 +8560,70 @@
               <a:t>Who begins on which week. Open: the 13-day limit’s written source; the FF19 reading.</a:t>
             </a:r>
             <a:endParaRPr lang="en-US" sz="1300" dirty="0"/>
+          </a:p>
+        </p:txBody>
+      </p:sp>
+      <p:sp>
+        <p:nvSpPr>
+          <p:cNvPr id="25" name="Banner"/>
+          <p:cNvSpPr/>
+          <p:nvPr/>
+        </p:nvSpPr>
+        <p:spPr>
+          <a:xfrm>
+            <a:off x="457200" y="4160520"/>
+            <a:ext cx="8229600" cy="548640"/>
+          </a:xfrm>
+          <a:prstGeom prst="roundRect">
+            <a:avLst>
+              <a:gd name="adj" fmla="val 16667"/>
+            </a:avLst>
+          </a:prstGeom>
+          <a:solidFill>
+            <a:srgbClr val="001E3C"/>
+          </a:solidFill>
+          <a:ln w="12700">
+            <a:solidFill>
+              <a:srgbClr val="001E3C"/>
+            </a:solidFill>
+            <a:prstDash val="solid"/>
+          </a:ln>
+        </p:spPr>
+      </p:sp>
+      <p:sp>
+        <p:nvSpPr>
+          <p:cNvPr id="26" name="Banner text"/>
+          <p:cNvSpPr txBox="1"/>
+          <p:nvPr/>
+        </p:nvSpPr>
+        <p:spPr>
+          <a:xfrm>
+            <a:off x="640080" y="4160520"/>
+            <a:ext cx="7863840" cy="548640"/>
+          </a:xfrm>
+          <a:prstGeom prst="rect">
+            <a:avLst/>
+          </a:prstGeom>
+          <a:noFill/>
+        </p:spPr>
+        <p:txBody>
+          <a:bodyPr wrap="square" lIns="0" tIns="0" rIns="0" bIns="0" rtlCol="0" anchor="ctr"/>
+          <a:lstStyle/>
+          <a:p>
+            <a:pPr indent="0" marL="0">
+              <a:buNone/>
+            </a:pPr>
+            <a:r>
+              <a:rPr lang="en-US" sz="1400" b="1" dirty="0">
+                <a:solidFill>
+                  <a:srgbClr val="FFFFFF"/>
+                </a:solidFill>
+                <a:latin typeface="Inter" pitchFamily="34" charset="0"/>
+                <a:ea typeface="Inter" pitchFamily="34" charset="-122"/>
+                <a:cs typeface="Inter" pitchFamily="34" charset="-120"/>
+              </a:rPr>
+              <a:t>Colleagues’ views come first; the link is chosen after them, then who starts where.</a:t>
+            </a:r>
           </a:p>
         </p:txBody>
       </p:sp>
@@ -8535,7 +8660,7 @@
                 <a:ea typeface="Inter" pitchFamily="34" charset="-122"/>
                 <a:cs typeface="Inter" pitchFamily="34" charset="-120"/>
               </a:rPr>
-              <a:t>Short Run · December 2026 CEA link · for managers · 9</a:t>
+              <a:t>Short Run · December 2026 link proposal · for managers · 9</a:t>
             </a:r>
             <a:endParaRPr lang="en-US" sz="900" dirty="0"/>
           </a:p>

--- a/docs/links-26/presentations/Short-Run-for-managers.pptx
+++ b/docs/links-26/presentations/Short-Run-for-managers.pptx
@@ -6353,7 +6353,7 @@
                 <a:ea typeface="Inter" pitchFamily="34" charset="-122"/>
                 <a:cs typeface="Inter" pitchFamily="34" charset="-120"/>
               </a:rPr>
-              <a:t>What all three shortlisted links give, what this one adds, and what it costs</a:t>
+              <a:t>What all four shortlisted links give, what this one adds, and what it costs</a:t>
             </a:r>
             <a:endParaRPr lang="en-US" sz="1500" dirty="0"/>
           </a:p>
@@ -6456,7 +6456,7 @@
                 <a:ea typeface="Inter" pitchFamily="34" charset="-122"/>
                 <a:cs typeface="Inter" pitchFamily="34" charset="-120"/>
               </a:rPr>
-              <a:t>All three shortlisted: all 9 December rules, all 3 flexible ones, no fatigue warning</a:t>
+              <a:t>All four shortlisted: all 9 December rules and no avoidable fatigue warning</a:t>
             </a:r>
             <a:endParaRPr lang="en-US" sz="1500" dirty="0"/>
           </a:p>
@@ -6559,7 +6559,7 @@
                 <a:ea typeface="Inter" pitchFamily="34" charset="-122"/>
                 <a:cs typeface="Inter" pitchFamily="34" charset="-120"/>
               </a:rPr>
-              <a:t>All three shortlisted: about 14 full weekends off a year (today 10), at most 5 apart</a:t>
+              <a:t>All four shortlisted: about 14 full weekends off a year (today 10), at most 5 apart</a:t>
             </a:r>
             <a:endParaRPr lang="en-US" sz="1500" dirty="0"/>
           </a:p>
@@ -6662,7 +6662,7 @@
                 <a:ea typeface="Inter" pitchFamily="34" charset="-122"/>
                 <a:cs typeface="Inter" pitchFamily="34" charset="-120"/>
               </a:rPr>
-              <a:t>All three shortlisted: no shift over 9 hours, and every closing shift shorter</a:t>
+              <a:t>All four shortlisted: no shift over 9 hours, and every closing shift shorter</a:t>
             </a:r>
             <a:endParaRPr lang="en-US" sz="1500" dirty="0"/>
           </a:p>

--- a/docs/links-26/presentations/Short-Run-for-managers.pptx
+++ b/docs/links-26/presentations/Short-Run-for-managers.pptx
@@ -6765,7 +6765,7 @@
                 <a:ea typeface="Inter" pitchFamily="34" charset="-122"/>
                 <a:cs typeface="Inter" pitchFamily="34" charset="-120"/>
               </a:rPr>
-              <a:t>This one adds: never more than 5 days in a row on the fixed rota (today 7)</a:t>
+              <a:t>This one adds: five-day runs, the most weeks on one turn, the fewest late finishes</a:t>
             </a:r>
             <a:endParaRPr lang="en-US" sz="1500" dirty="0"/>
           </a:p>

--- a/docs/links-26/presentations/Short-Run-for-managers.pptx
+++ b/docs/links-26/presentations/Short-Run-for-managers.pptx
@@ -6353,7 +6353,7 @@
                 <a:ea typeface="Inter" pitchFamily="34" charset="-122"/>
                 <a:cs typeface="Inter" pitchFamily="34" charset="-120"/>
               </a:rPr>
-              <a:t>What all three shortlisted links give, what this one adds, and what it costs</a:t>
+              <a:t>What all four shortlisted links give, what this one adds, and what it costs</a:t>
             </a:r>
             <a:endParaRPr lang="en-US" sz="1500" dirty="0"/>
           </a:p>
@@ -6456,7 +6456,7 @@
                 <a:ea typeface="Inter" pitchFamily="34" charset="-122"/>
                 <a:cs typeface="Inter" pitchFamily="34" charset="-120"/>
               </a:rPr>
-              <a:t>All three shortlisted: all 9 December rules, all 3 flexible ones, no fatigue warning</a:t>
+              <a:t>All four shortlisted: all 9 December rules and no avoidable fatigue warning</a:t>
             </a:r>
             <a:endParaRPr lang="en-US" sz="1500" dirty="0"/>
           </a:p>
@@ -6559,7 +6559,7 @@
                 <a:ea typeface="Inter" pitchFamily="34" charset="-122"/>
                 <a:cs typeface="Inter" pitchFamily="34" charset="-120"/>
               </a:rPr>
-              <a:t>All three shortlisted: about 14 full weekends off a year (today 10), at most 5 apart</a:t>
+              <a:t>All four shortlisted: about 14 full weekends off a year (today 10), at most 5 apart</a:t>
             </a:r>
             <a:endParaRPr lang="en-US" sz="1500" dirty="0"/>
           </a:p>
@@ -6662,7 +6662,7 @@
                 <a:ea typeface="Inter" pitchFamily="34" charset="-122"/>
                 <a:cs typeface="Inter" pitchFamily="34" charset="-120"/>
               </a:rPr>
-              <a:t>All three shortlisted: no shift over 9 hours, and every closing shift shorter</a:t>
+              <a:t>All four shortlisted: no shift over 9 hours, and every closing shift shorter</a:t>
             </a:r>
             <a:endParaRPr lang="en-US" sz="1500" dirty="0"/>
           </a:p>
@@ -6765,7 +6765,7 @@
                 <a:ea typeface="Inter" pitchFamily="34" charset="-122"/>
                 <a:cs typeface="Inter" pitchFamily="34" charset="-120"/>
               </a:rPr>
-              <a:t>This one adds: never more than 5 days in a row on the fixed rota (today 7)</a:t>
+              <a:t>This one adds: five-day runs, the most weeks on one turn, the fewest late finishes</a:t>
             </a:r>
             <a:endParaRPr lang="en-US" sz="1500" dirty="0"/>
           </a:p>

--- a/docs/links-26/presentations/Short-Run-for-managers.pptx
+++ b/docs/links-26/presentations/Short-Run-for-managers.pptx
@@ -1458,7 +1458,7 @@
           <a:p>
             <a:r>
               <a:rPr lang="en-US" dirty="0"/>
-              <a:t>This is the case in one slide. It meets every December staffing rule and keeps the shift times people already work wherever that cost little — nine of its fifteen are worked today, and none on a Saturday is new. Nobody works more than five days in a row on the fixed rota, where today it is seven; a cover week placed badly can make it six, never more. Every working week is all earlies or all lates, and 18 of the 21 keep one shift time Monday to Friday, where today it is seven weeks in 16. Its seven full weekends off in 26 weeks are never more than five weeks apart, which is as close as the five cover weeks allow; today it is four in 20, up to seven weeks apart. The honest cost is late finishes, and it is the smallest one possible: the December staffing needs three to the close every day, and only those three finish after 23:00, so finishes at 23:00 or later go from about 39 to 42 a year each. Its heaviest week is 42h 30m, against today’s 43h 50m. Every closing shift is 30 to 45 minutes shorter. Six shift times are new.</a:t>
+              <a:t>This is the case in one slide. It meets every December staffing rule and keeps the shift times people already work wherever that cost little — nine of its fifteen are worked today, and none on a Saturday is new. Nobody works more than five days in a row on the fixed rota, where today it is seven; a cover week placed badly can make it six, never more. Every working week is all earlies or all lates, and 18 of the 21 keep one shift time Monday to Friday, where today it is seven weeks in 16. Its seven full weekends off in 26 weeks are never more than five weeks apart, which is as close as the five cover weeks allow; today it is four in 20, up to seven weeks apart. The honest costs: its new weekday early, 07:00–16:00, is 9 hours, about 20 a year each, where today no early is over 8h 30m; and late finishes, the smallest rise possible — the December staffing needs three to the close every day, and only those three finish after 23:00, so finishes at 23:00 or later go from about 39 to 42 a year each. Its heaviest week is 42h 30m, against today’s 43h 50m. Every closing shift is 30 to 45 minutes shorter. Six shift times are new. It is on the shortlist with In Step (30 October 2026), and against it has the same run, weekends, weeks on one shift time, late finishes and leave. What it has that In Step has not: fewer long days (its weekday earlies over 8h 30m, all 9h 00m, come about 20 times a year each, against In Step’s 40 at 8h 45m and 8h 55m), the closer weekday fit (29.1 against 29.8) and no new Saturday time. What it gives up: today’s 13:45, a Saturday closer of 8h 40m against In Step’s 8h 10m, and heavier, less even weeks (24h 30m to 42h 30m, against 25h 30m to 41h 05m).</a:t>
             </a:r>
             <a:endParaRPr lang="en-US" dirty="0"/>
           </a:p>
@@ -6353,7 +6353,7 @@
                 <a:ea typeface="Inter" pitchFamily="34" charset="-122"/>
                 <a:cs typeface="Inter" pitchFamily="34" charset="-120"/>
               </a:rPr>
-              <a:t>What all four shortlisted links give, what this one adds, and what it costs</a:t>
+              <a:t>What both shortlisted links give, what this one adds, and what it costs</a:t>
             </a:r>
             <a:endParaRPr lang="en-US" sz="1500" dirty="0"/>
           </a:p>
@@ -6456,7 +6456,7 @@
                 <a:ea typeface="Inter" pitchFamily="34" charset="-122"/>
                 <a:cs typeface="Inter" pitchFamily="34" charset="-120"/>
               </a:rPr>
-              <a:t>All four shortlisted: all 9 December rules and no avoidable fatigue warning</a:t>
+              <a:t>Both shortlisted: all 9 December rules and no avoidable fatigue warning</a:t>
             </a:r>
             <a:endParaRPr lang="en-US" sz="1500" dirty="0"/>
           </a:p>
@@ -6559,7 +6559,7 @@
                 <a:ea typeface="Inter" pitchFamily="34" charset="-122"/>
                 <a:cs typeface="Inter" pitchFamily="34" charset="-120"/>
               </a:rPr>
-              <a:t>All four shortlisted: about 14 full weekends off a year (today 10), at most 5 apart</a:t>
+              <a:t>Both shortlisted: about 14 full weekends off a year (today 10), at most 5 apart</a:t>
             </a:r>
             <a:endParaRPr lang="en-US" sz="1500" dirty="0"/>
           </a:p>
@@ -6662,7 +6662,7 @@
                 <a:ea typeface="Inter" pitchFamily="34" charset="-122"/>
                 <a:cs typeface="Inter" pitchFamily="34" charset="-120"/>
               </a:rPr>
-              <a:t>All four shortlisted: no shift over 9 hours, and every closing shift shorter</a:t>
+              <a:t>Both shortlisted: no shift over 9 hours, and every closing shift shorter</a:t>
             </a:r>
             <a:endParaRPr lang="en-US" sz="1500" dirty="0"/>
           </a:p>
@@ -6765,7 +6765,7 @@
                 <a:ea typeface="Inter" pitchFamily="34" charset="-122"/>
                 <a:cs typeface="Inter" pitchFamily="34" charset="-120"/>
               </a:rPr>
-              <a:t>This one adds: five-day runs, the most weeks on one turn, the fewest late finishes</a:t>
+              <a:t>This one adds: half the long earlies, a closer weekday fit, no new Saturday time</a:t>
             </a:r>
             <a:endParaRPr lang="en-US" sz="1500" dirty="0"/>
           </a:p>
@@ -6868,7 +6868,7 @@
                 <a:ea typeface="Inter" pitchFamily="34" charset="-122"/>
                 <a:cs typeface="Inter" pitchFamily="34" charset="-120"/>
               </a:rPr>
-              <a:t>9 of 15 shift times worked today; 6 new, several shorter versions of today’s lates</a:t>
+              <a:t>9 of 15 shift times worked today; 6 new, four shorter versions of today’s lates</a:t>
             </a:r>
             <a:endParaRPr lang="en-US" sz="1500" dirty="0"/>
           </a:p>
@@ -6971,7 +6971,7 @@
                 <a:ea typeface="Inter" pitchFamily="34" charset="-122"/>
                 <a:cs typeface="Inter" pitchFamily="34" charset="-120"/>
               </a:rPr>
-              <a:t>Costs: one 42h 30m week (today up to 43h 50m); four weeks off 15 days, not 14</a:t>
+              <a:t>Costs: 20 weekday earlies a year over 8h 30m; four weeks off 15 days, not 14</a:t>
             </a:r>
             <a:endParaRPr lang="en-US" sz="1500" dirty="0"/>
           </a:p>

--- a/docs/links-26/presentations/Short-Run-for-managers.pptx
+++ b/docs/links-26/presentations/Short-Run-for-managers.pptx
@@ -1018,7 +1018,7 @@
           <a:p>
             <a:r>
               <a:rPr lang="en-US" dirty="0"/>
-              <a:t>The nine rules are the December 2026 rules, as confirmed verbally on 29 September 2026: at least four at the open, three to the close, five after 22:00, 10 on a Sunday, the ticket office in fixed pairs, two on the floor at all times, handovers, 8–9 hour Sundays and no more shift times than today. Behind them sit three flexible rules that are aimed for when designing but not scored on: 14 on a Saturday, five cover weeks as evenly spaced as 26 weeks allow, and weekday closers starting at 15:45. Short Run meets all three. It also stays under the ceiling of 219 contracted days a year agreed on 1 October 2026, at 218.6.</a:t>
+              <a:t>The nine rules are the December 2026 rules, as confirmed verbally on 29 September 2026: at least four at the open, three to the close, five after 22:00, 10 on a Sunday, the ticket office in fixed pairs, two on the floor at all times, handovers, 8–9 hour Sundays and no more shift times than today. Behind them sit three flexible rules that are aimed for when designing but not scored on: 14 on a Saturday, five cover weeks as evenly spaced as 26 weeks allow, and weekday closers starting at 15:45. Short Run meets all three. It also stays under the ceiling of 219 contracted days a year set on 1 October 2026, at 218.6.</a:t>
             </a:r>
             <a:endParaRPr lang="en-US" dirty="0"/>
           </a:p>
@@ -1194,7 +1194,7 @@
           <a:p>
             <a:r>
               <a:rPr lang="en-US" dirty="0"/>
-              <a:t>The figure compares, hour by hour, the share of the day’s floor staff on duty with the share of the day’s train service, each train weighted by its length. 0 would be a perfect match. It is a guide to shape, not a staffing requirement — the rules on the previous slide are the requirement. Against today’s link, Short Run’s score is a little over half on weekdays, about a fifth on a Saturday and about two-fifths on a Sunday; lower is closer. The score is a measure of the day’s shape only — not a staffing requirement or a passenger forecast.</a:t>
+              <a:t>The figure compares, hour by hour, the share of the day’s floor staff on duty with the share of the day’s train service, each train weighted by its length. 0 would be a perfect match. It is a guide to shape, not a staffing requirement or a passenger forecast — the rules on the previous slide are the requirement. Against today’s link, Short Run’s score is a little over half on weekdays, about a fifth on a Saturday and about two-fifths on a Sunday; lower is closer.</a:t>
             </a:r>
             <a:endParaRPr lang="en-US" dirty="0"/>
           </a:p>
@@ -1282,7 +1282,7 @@
           <a:p>
             <a:r>
               <a:rPr lang="en-US" dirty="0"/>
-              <a:t>Working weeks average exactly 35 hours Monday to Saturday — 44,100 minutes across the 21 working weeks — so no overtime is needed to balance the Monday-to-Saturday week. Individual weeks range from 24h 30m to 42h 30m — today’s run from 25h 10m to 43h 50m, so the heaviest is lighter than today’s heaviest and the lightest a little lighter than today’s lightest; only the average is the contract, as today. Five cover weeks keep about the same share of the link as today’s four in 20 (one week in 5.2, against one in 5). Sunday is not contracted, so the ten Sunday duties are worked as rest-day overtime, exactly as today’s eight are. The two extra Sunday overtime duties a week come from the Sunday staffing of ten, confirmed verbally — any link that meets the rules needs them. The 26-week link, its five cover weeks and the ceiling of 219 contracted days a year were agreed on 1 October 2026; Short Run gives 218.6.</a:t>
+              <a:t>Working weeks average exactly 35 hours Monday to Saturday — 44,100 minutes across the 21 working weeks — so no overtime is needed to balance the Monday-to-Saturday week. Individual weeks range from 24h 30m to 42h 30m — today’s run from 25h 10m to 43h 50m, so the heaviest is lighter than today’s heaviest and the lightest a little lighter than today’s lightest; only the average is the contract, as today. Five cover weeks keep about the same share of the link as today’s four in 20 (one week in 5.2, against one in 5). Sunday is not contracted, so the ten Sunday duties are worked as rest-day overtime, exactly as today’s eight are. The two extra Sunday overtime duties a week come from the Sunday staffing of ten, confirmed verbally — any link that meets the rules needs them. The 26-week link, its five cover weeks and the ceiling of 219 contracted days a year were set on 1 October 2026; Short Run gives 218.6.</a:t>
             </a:r>
             <a:endParaRPr lang="en-US" dirty="0"/>
           </a:p>
@@ -1370,7 +1370,7 @@
           <a:p>
             <a:r>
               <a:rPr lang="en-US" dirty="0"/>
-              <a:t>The ORR factors are good practice, not pass/fail limits, and this is not a fatigue risk assessment. Two factors — early starts at a 06:20 station and a weekly rotation — come with every weekly link, so they are recorded on the proposal sheet for information and not counted. One definition, successive start times varying by more than two hours, is counted on our reading and should be confirmed by whoever assesses it. Early starts and a weekly rotation come with every link, so they are not counted. The written source of the 13-day limit is still to be confirmed.</a:t>
+              <a:t>The ORR factors are good practice, not pass/fail limits, and this is not a fatigue risk assessment. Two factors — early starts at a 06:20 station and a weekly rotation — come with every weekly link, so they are recorded on the proposal sheet for information and not counted. One definition, successive start times varying by more than two hours, is counted on our reading, in which a rest day breaks the run, and whoever assesses it should confirm that: on the stricter reading every link has it (FF19 on the rules sheet). The written source of the 13-day limit is still to be confirmed.</a:t>
             </a:r>
             <a:endParaRPr lang="en-US" dirty="0"/>
           </a:p>
@@ -1458,7 +1458,7 @@
           <a:p>
             <a:r>
               <a:rPr lang="en-US" dirty="0"/>
-              <a:t>This is the case in one slide. It meets every December staffing rule and keeps the shift times people already work wherever that cost little — nine of its fifteen are worked today, and none on a Saturday is new. Nobody works more than five days in a row on the fixed rota, where today it is seven; a cover week placed badly can make it six, never more. Every working week is all earlies or all lates, and 18 of the 21 keep one shift time Monday to Friday, where today it is seven weeks in 16. Its seven full weekends off in 26 weeks are never more than five weeks apart, which is as close as the five cover weeks allow; today it is four in 20, up to seven weeks apart. The honest costs: its new weekday early, 07:00–16:00, is 9 hours, about 20 a year each, where today no early is over 8h 30m; and late finishes, the smallest rise possible — the December staffing needs three to the close every day, and only those three finish after 23:00, so finishes at 23:00 or later go from about 39 to 42 a year each. Its heaviest week is 42h 30m, against today’s 43h 50m. Every closing shift is 30 to 45 minutes shorter. Six shift times are new. It is on the shortlist with In Step (30 October 2026), and against it has the same run, weekends, weeks on one shift time, late finishes and leave. What it has that In Step has not: fewer long days (its weekday earlies over 8h 30m, all 9h 00m, come about 20 times a year each, against In Step’s 40 at 8h 45m and 8h 55m), the closer weekday fit (29.1 against 29.8) and no new Saturday time. What it gives up: today’s 13:45, a Saturday closer of 8h 40m against In Step’s 8h 10m, and heavier, less even weeks (24h 30m to 42h 30m, against 25h 30m to 41h 05m).</a:t>
+              <a:t>This is the case in one slide. It meets every December staffing rule and keeps the shift times people already work wherever that cost little — nine of its fifteen are worked today, and none on a Saturday is new. Nobody works more than five days in a row on the fixed rota, where today it is seven; a cover week placed badly can make it six, never more. Every working week is all earlies or all lates, and 18 of the 21 keep one shift time Monday to Friday; today seven weeks in 16 do both. Its seven full weekends off in 26 weeks are never more than five weeks apart, which is as close as the five cover weeks allow; today it is four in 20, up to seven weeks apart. The honest costs: its new weekday early, 07:00–16:00, is 9 hours, about 20 a year each, where today no early is over 8h 30m; and late finishes, the smallest rise possible — the December staffing needs three to the close every day, and only those three finish after 23:00, so finishes at 23:00 or later go from about 39 to 42 a year each. Its heaviest week is 42h 30m, against today’s 43h 50m. Every closing shift is 30 to 45 minutes shorter. Six shift times are new. It is on the shortlist with In Step (30 October 2026), and against it has the same run, weekends, weeks on one shift time, late finishes and leave. What it has that In Step has not: fewer long days — 28 shifts a year each over 8h 30m against In Step’s 42, its weekday earlies over 8h 30m (all 9h 00m) coming about 20 times a year against In Step’s 40 (8h 45m and 8h 55m) — the closer weekday fit (29.1 against 29.8) and no new Saturday time. What it gives up: today’s 13:45, a Saturday closer of 8h 40m against In Step’s 8h 10m, a weaker Saturday fit (12.7 against 9.6), and less even weeks (24h 30m to 42h 30m, against 25h 30m to 41h 05m).</a:t>
             </a:r>
             <a:endParaRPr lang="en-US" dirty="0"/>
           </a:p>
@@ -1546,7 +1546,7 @@
           <a:p>
             <a:r>
               <a:rPr lang="en-US" dirty="0"/>
-              <a:t>Days at work stay at 219 a year (218.6 exactly; Monday to Saturday; Sunday is overtime), under the ceiling agreed on 1 October 2026. Late finishes average about three more a year each, all of them from the December staffing — three to the close every day, where today’s weekdays have two — so no link meeting the same rules on 26 weeks could have fewer. Full weekends off are seven in 26 and never more than five weeks apart; nobody works more than five days in a row on the fixed rota; no week mixes earlies and lates, and 18 of the 21 working weeks keep one shift time. Weekly hours run from 24h 30m to 42h 30m (today 25h 10m to 43h 50m); only the average is the contract. The average shift is about two minutes longer.</a:t>
+              <a:t>Days at work stay at 219 a year (218.6 exactly; Monday to Saturday; Sunday is overtime), under the ceiling set on 1 October 2026. Late finishes average about three more a year each, all of them from the December staffing — three to the close every day, where today has two Monday to Saturday — so no link meeting the same rules on 26 weeks could have fewer. Full weekends off are seven in 26 and never more than five weeks apart; nobody works more than five days in a row on the fixed rota; no week mixes earlies and lates, and 18 of the 21 working weeks keep one shift time. Weekly hours run from 24h 30m to 42h 30m (today 25h 10m to 43h 50m); only the average is the contract. The average shift is about two minutes longer.</a:t>
             </a:r>
             <a:endParaRPr lang="en-US" dirty="0"/>
           </a:p>
@@ -6889,11 +6889,11 @@
             <a:avLst/>
           </a:prstGeom>
           <a:solidFill>
-            <a:srgbClr val="1E7B4B"/>
+            <a:srgbClr val="A15C00"/>
           </a:solidFill>
           <a:ln w="12700">
             <a:solidFill>
-              <a:srgbClr val="1E7B4B"/>
+              <a:srgbClr val="A15C00"/>
             </a:solidFill>
             <a:prstDash val="solid"/>
           </a:ln>
@@ -7588,7 +7588,7 @@
                 <a:ea typeface="Inter" pitchFamily="34" charset="-122"/>
                 <a:cs typeface="Inter" pitchFamily="34" charset="-120"/>
               </a:rPr>
-              <a:t>Average shift about 2 minutes longer</a:t>
+              <a:t>A longer weekday early, 9h 00m</a:t>
             </a:r>
             <a:endParaRPr lang="en-US" sz="1300" dirty="0"/>
           </a:p>

--- a/docs/links-26/presentations/Short-Run-for-managers.pptx
+++ b/docs/links-26/presentations/Short-Run-for-managers.pptx
@@ -1018,7 +1018,7 @@
           <a:p>
             <a:r>
               <a:rPr lang="en-US" dirty="0"/>
-              <a:t>The nine rules are the December 2026 rules, as confirmed verbally on 29 September 2026: at least four at the open, three to the close, five after 22:00, 10 on a Sunday, the ticket office in fixed pairs, two on the floor at all times, handovers, 8–9 hour Sundays and no more shift times than today. Behind them sit three flexible rules that are aimed for when designing but not scored on: 14 on a Saturday, five cover weeks as evenly spaced as 26 weeks allow, and weekday closers starting at 15:45. Short Run meets all three. It also stays under the ceiling of 219 contracted days a year agreed on 1 October 2026, at 218.6.</a:t>
+              <a:t>The nine rules are the December 2026 rules, as confirmed verbally on 29 September 2026: at least four at the open, three to the close, five after 22:00, 10 on a Sunday, the ticket office in fixed pairs, two on the floor at all times, handovers, 8–9 hour Sundays and no more shift times than today. Behind them sit three flexible rules that are aimed for when designing but not scored on: 14 on a Saturday, five cover weeks as evenly spaced as 26 weeks allow, and weekday closers starting at 15:45. Short Run meets all three. It also stays under the ceiling of 219 contracted days a year set on 1 October 2026, at 218.6.</a:t>
             </a:r>
             <a:endParaRPr lang="en-US" dirty="0"/>
           </a:p>
@@ -1194,7 +1194,7 @@
           <a:p>
             <a:r>
               <a:rPr lang="en-US" dirty="0"/>
-              <a:t>The figure compares, hour by hour, the share of the day’s floor staff on duty with the share of the day’s train service, each train weighted by its length. 0 would be a perfect match. It is a guide to shape, not a staffing requirement — the rules on the previous slide are the requirement. Against today’s link, Short Run’s score is a little over half on weekdays, about a fifth on a Saturday and about two-fifths on a Sunday; lower is closer. The score is a measure of the day’s shape only — not a staffing requirement or a passenger forecast.</a:t>
+              <a:t>The figure compares, hour by hour, the share of the day’s floor staff on duty with the share of the day’s train service, each train weighted by its length. 0 would be a perfect match. It is a guide to shape, not a staffing requirement or a passenger forecast — the rules on the previous slide are the requirement. Against today’s link, Short Run’s score is a little over half on weekdays, about a fifth on a Saturday and about two-fifths on a Sunday; lower is closer.</a:t>
             </a:r>
             <a:endParaRPr lang="en-US" dirty="0"/>
           </a:p>
@@ -1282,7 +1282,7 @@
           <a:p>
             <a:r>
               <a:rPr lang="en-US" dirty="0"/>
-              <a:t>Working weeks average exactly 35 hours Monday to Saturday — 44,100 minutes across the 21 working weeks — so no overtime is needed to balance the Monday-to-Saturday week. Individual weeks range from 24h 30m to 42h 30m — today’s run from 25h 10m to 43h 50m, so the heaviest is lighter than today’s heaviest and the lightest a little lighter than today’s lightest; only the average is the contract, as today. Five cover weeks keep about the same share of the link as today’s four in 20 (one week in 5.2, against one in 5). Sunday is not contracted, so the ten Sunday duties are worked as rest-day overtime, exactly as today’s eight are. The two extra Sunday overtime duties a week come from the Sunday staffing of ten, confirmed verbally — any link that meets the rules needs them. The 26-week link, its five cover weeks and the ceiling of 219 contracted days a year were agreed on 1 October 2026; Short Run gives 218.6.</a:t>
+              <a:t>Working weeks average exactly 35 hours Monday to Saturday — 44,100 minutes across the 21 working weeks — so no overtime is needed to balance the Monday-to-Saturday week. Individual weeks range from 24h 30m to 42h 30m — today’s run from 25h 10m to 43h 50m, so the heaviest is lighter than today’s heaviest and the lightest a little lighter than today’s lightest; only the average is the contract, as today. Five cover weeks keep about the same share of the link as today’s four in 20 (one week in 5.2, against one in 5). Sunday is not contracted, so the ten Sunday duties are worked as rest-day overtime, exactly as today’s eight are. The two extra Sunday overtime duties a week come from the Sunday staffing of ten, confirmed verbally — any link that meets the rules needs them. The 26-week link, its five cover weeks and the ceiling of 219 contracted days a year were set on 1 October 2026; Short Run gives 218.6.</a:t>
             </a:r>
             <a:endParaRPr lang="en-US" dirty="0"/>
           </a:p>
@@ -1370,7 +1370,7 @@
           <a:p>
             <a:r>
               <a:rPr lang="en-US" dirty="0"/>
-              <a:t>The ORR factors are good practice, not pass/fail limits, and this is not a fatigue risk assessment. Two factors — early starts at a 06:20 station and a weekly rotation — come with every weekly link, so they are recorded on the proposal sheet for information and not counted. One definition, successive start times varying by more than two hours, is counted on our reading and should be confirmed by whoever assesses it. Early starts and a weekly rotation come with every link, so they are not counted. The written source of the 13-day limit is still to be confirmed.</a:t>
+              <a:t>The ORR factors are good practice, not pass/fail limits, and this is not a fatigue risk assessment. Two factors — early starts at a 06:20 station and a weekly rotation — come with every weekly link, so they are recorded on the proposal sheet for information and not counted. One definition, successive start times varying by more than two hours, is counted on our reading, in which a rest day breaks the run, and whoever assesses it should confirm that: on the stricter reading every link has it (FF19 on the rules sheet). The written source of the 13-day limit is still to be confirmed.</a:t>
             </a:r>
             <a:endParaRPr lang="en-US" dirty="0"/>
           </a:p>
@@ -1458,7 +1458,7 @@
           <a:p>
             <a:r>
               <a:rPr lang="en-US" dirty="0"/>
-              <a:t>This is the case in one slide. It meets every December staffing rule and keeps the shift times people already work wherever that cost little — nine of its fifteen are worked today, and none on a Saturday is new. Nobody works more than five days in a row on the fixed rota, where today it is seven; a cover week placed badly can make it six, never more. Every working week is all earlies or all lates, and 18 of the 21 keep one shift time Monday to Friday, where today it is seven weeks in 16. Its seven full weekends off in 26 weeks are never more than five weeks apart, which is as close as the five cover weeks allow; today it is four in 20, up to seven weeks apart. The honest cost is late finishes, and it is the smallest one possible: the December staffing needs three to the close every day, and only those three finish after 23:00, so finishes at 23:00 or later go from about 39 to 42 a year each. Its heaviest week is 42h 30m, against today’s 43h 50m. Every closing shift is 30 to 45 minutes shorter. Six shift times are new.</a:t>
+              <a:t>This is the case in one slide. It meets every December staffing rule and keeps the shift times people already work wherever that cost little — nine of its fifteen are worked today, and none on a Saturday is new. Nobody works more than five days in a row on the fixed rota, where today it is seven; a cover week placed badly can make it six, never more. Every working week is all earlies or all lates, and 18 of the 21 keep one shift time Monday to Friday; today seven weeks in 16 do both. Its seven full weekends off in 26 weeks are never more than five weeks apart, which is as close as the five cover weeks allow; today it is four in 20, up to seven weeks apart. The honest costs: its new weekday early, 07:00–16:00, is 9 hours, about 20 a year each, where today no early is over 8h 30m; and late finishes, the smallest rise possible — the December staffing needs three to the close every day, and only those three finish after 23:00, so finishes at 23:00 or later go from about 39 to 42 a year each. Its heaviest week is 42h 30m, against today’s 43h 50m. Every closing shift is 30 to 45 minutes shorter. Six shift times are new. It is on the shortlist with In Step (30 October 2026), and against it has the same run, weekends, weeks on one shift time, late finishes and leave. What it has that In Step has not: fewer long days — 28 shifts a year each over 8h 30m against In Step’s 42, its weekday earlies over 8h 30m (all 9h 00m) coming about 20 times a year against In Step’s 40 (8h 45m and 8h 55m) — the closer weekday fit (29.1 against 29.8) and no new Saturday time. What it gives up: today’s 13:45, a Saturday closer of 8h 40m against In Step’s 8h 10m, a weaker Saturday fit (12.7 against 9.6), and less even weeks (24h 30m to 42h 30m, against 25h 30m to 41h 05m).</a:t>
             </a:r>
             <a:endParaRPr lang="en-US" dirty="0"/>
           </a:p>
@@ -1546,7 +1546,7 @@
           <a:p>
             <a:r>
               <a:rPr lang="en-US" dirty="0"/>
-              <a:t>Days at work stay at 219 a year (218.6 exactly; Monday to Saturday; Sunday is overtime), under the ceiling agreed on 1 October 2026. Late finishes average about three more a year each, all of them from the December staffing — three to the close every day, where today’s weekdays have two — so no link meeting the same rules on 26 weeks could have fewer. Full weekends off are seven in 26 and never more than five weeks apart; nobody works more than five days in a row on the fixed rota; no week mixes earlies and lates, and 18 of the 21 working weeks keep one shift time. Weekly hours run from 24h 30m to 42h 30m (today 25h 10m to 43h 50m); only the average is the contract. The average shift is about two minutes longer.</a:t>
+              <a:t>Days at work stay at 219 a year (218.6 exactly; Monday to Saturday; Sunday is overtime), under the ceiling set on 1 October 2026. Late finishes average about three more a year each, all of them from the December staffing — three to the close every day, where today has two Monday to Saturday — so no link meeting the same rules on 26 weeks could have fewer. Full weekends off are seven in 26 and never more than five weeks apart; nobody works more than five days in a row on the fixed rota; no week mixes earlies and lates, and 18 of the 21 working weeks keep one shift time. Weekly hours run from 24h 30m to 42h 30m (today 25h 10m to 43h 50m); only the average is the contract. The average shift is about two minutes longer.</a:t>
             </a:r>
             <a:endParaRPr lang="en-US" dirty="0"/>
           </a:p>
@@ -6353,7 +6353,7 @@
                 <a:ea typeface="Inter" pitchFamily="34" charset="-122"/>
                 <a:cs typeface="Inter" pitchFamily="34" charset="-120"/>
               </a:rPr>
-              <a:t>What all four shortlisted links give, what this one adds, and what it costs</a:t>
+              <a:t>What both shortlisted links give, what this one adds, and what it costs</a:t>
             </a:r>
             <a:endParaRPr lang="en-US" sz="1500" dirty="0"/>
           </a:p>
@@ -6456,7 +6456,7 @@
                 <a:ea typeface="Inter" pitchFamily="34" charset="-122"/>
                 <a:cs typeface="Inter" pitchFamily="34" charset="-120"/>
               </a:rPr>
-              <a:t>All four shortlisted: all 9 December rules and no avoidable fatigue warning</a:t>
+              <a:t>Both shortlisted: all 9 December rules and no avoidable fatigue warning</a:t>
             </a:r>
             <a:endParaRPr lang="en-US" sz="1500" dirty="0"/>
           </a:p>
@@ -6559,7 +6559,7 @@
                 <a:ea typeface="Inter" pitchFamily="34" charset="-122"/>
                 <a:cs typeface="Inter" pitchFamily="34" charset="-120"/>
               </a:rPr>
-              <a:t>All four shortlisted: about 14 full weekends off a year (today 10), at most 5 apart</a:t>
+              <a:t>Both shortlisted: about 14 full weekends off a year (today 10), at most 5 apart</a:t>
             </a:r>
             <a:endParaRPr lang="en-US" sz="1500" dirty="0"/>
           </a:p>
@@ -6662,7 +6662,7 @@
                 <a:ea typeface="Inter" pitchFamily="34" charset="-122"/>
                 <a:cs typeface="Inter" pitchFamily="34" charset="-120"/>
               </a:rPr>
-              <a:t>All four shortlisted: no shift over 9 hours, and every closing shift shorter</a:t>
+              <a:t>Both shortlisted: no shift over 9 hours, and every closing shift shorter</a:t>
             </a:r>
             <a:endParaRPr lang="en-US" sz="1500" dirty="0"/>
           </a:p>
@@ -6765,7 +6765,7 @@
                 <a:ea typeface="Inter" pitchFamily="34" charset="-122"/>
                 <a:cs typeface="Inter" pitchFamily="34" charset="-120"/>
               </a:rPr>
-              <a:t>This one adds: five-day runs, the most weeks on one turn, the fewest late finishes</a:t>
+              <a:t>This one adds: half the long earlies, a closer weekday fit, no new Saturday time</a:t>
             </a:r>
             <a:endParaRPr lang="en-US" sz="1500" dirty="0"/>
           </a:p>
@@ -6868,7 +6868,7 @@
                 <a:ea typeface="Inter" pitchFamily="34" charset="-122"/>
                 <a:cs typeface="Inter" pitchFamily="34" charset="-120"/>
               </a:rPr>
-              <a:t>9 of 15 shift times worked today; 6 new, several shorter versions of today’s lates</a:t>
+              <a:t>9 of 15 shift times worked today; 6 new, four shorter versions of today’s lates</a:t>
             </a:r>
             <a:endParaRPr lang="en-US" sz="1500" dirty="0"/>
           </a:p>
@@ -6889,11 +6889,11 @@
             <a:avLst/>
           </a:prstGeom>
           <a:solidFill>
-            <a:srgbClr val="1E7B4B"/>
+            <a:srgbClr val="A15C00"/>
           </a:solidFill>
           <a:ln w="12700">
             <a:solidFill>
-              <a:srgbClr val="1E7B4B"/>
+              <a:srgbClr val="A15C00"/>
             </a:solidFill>
             <a:prstDash val="solid"/>
           </a:ln>
@@ -6971,7 +6971,7 @@
                 <a:ea typeface="Inter" pitchFamily="34" charset="-122"/>
                 <a:cs typeface="Inter" pitchFamily="34" charset="-120"/>
               </a:rPr>
-              <a:t>Costs: one 42h 30m week (today up to 43h 50m); four weeks off 15 days, not 14</a:t>
+              <a:t>Costs: 20 weekday earlies a year over 8h 30m; four weeks off 15 days, not 14</a:t>
             </a:r>
             <a:endParaRPr lang="en-US" sz="1500" dirty="0"/>
           </a:p>
@@ -7588,7 +7588,7 @@
                 <a:ea typeface="Inter" pitchFamily="34" charset="-122"/>
                 <a:cs typeface="Inter" pitchFamily="34" charset="-120"/>
               </a:rPr>
-              <a:t>Average shift about 2 minutes longer</a:t>
+              <a:t>A longer weekday early, 9h 00m</a:t>
             </a:r>
             <a:endParaRPr lang="en-US" sz="1300" dirty="0"/>
           </a:p>

--- a/docs/links-26/presentations/Short-Run-for-managers.pptx
+++ b/docs/links-26/presentations/Short-Run-for-managers.pptx
@@ -1370,7 +1370,7 @@
           <a:p>
             <a:r>
               <a:rPr lang="en-US" dirty="0"/>
-              <a:t>The ORR factors are good practice, not pass/fail limits, and this is not a fatigue risk assessment. Two factors — early starts at a 06:20 station and a weekly rotation — come with every weekly link, so they are recorded on the proposal sheet for information and not counted. One definition, successive start times varying by more than two hours, is counted on our reading, in which a rest day breaks the run, and whoever assesses it should confirm that: on the stricter reading every link has it (FF19 on the rules sheet). The written source of the 13-day limit is still to be confirmed.</a:t>
+              <a:t>The ORR factors are good practice, not pass/fail limits, and this is not a fatigue risk assessment. Two factors — early starts at a 06:20 station and a weekly rotation — come with every weekly link, so they are recorded on the proposal sheet for information and not counted. One definition, successive start times varying by more than two hours, is counted on our reading, in which a rest day breaks the run, and whoever assesses it should confirm that: on the stricter reading every link has it (FF19 on the rules sheet). The “up to 1” beside the fatigue warnings is the rail industry’s 55-hour guideline: worked as four 8-hour duties straight after a busy line, with its Sunday as overtime too, a cover week can make 56.8 hours in seven days. Where the four fall, and whether the Sunday is worked, is for the roster office. The written source of the 13-day limit is still to be confirmed.</a:t>
             </a:r>
             <a:endParaRPr lang="en-US" dirty="0"/>
           </a:p>
@@ -1458,7 +1458,7 @@
           <a:p>
             <a:r>
               <a:rPr lang="en-US" dirty="0"/>
-              <a:t>This is the case in one slide. It meets every December staffing rule and keeps the shift times people already work wherever that cost little — nine of its fifteen are worked today, and none on a Saturday is new. Nobody works more than five days in a row on the fixed rota, where today it is seven; a cover week placed badly can make it six, never more. Every working week is all earlies or all lates, and 18 of the 21 keep one shift time Monday to Friday; today seven weeks in 16 do both. Its seven full weekends off in 26 weeks are never more than five weeks apart, which is as close as the five cover weeks allow; today it is four in 20, up to seven weeks apart. The honest costs: its new weekday early, 07:00–16:00, is 9 hours, about 20 a year each, where today no early is over 8h 30m; and late finishes, the smallest rise possible — the December staffing needs three to the close every day, and only those three finish after 23:00, so finishes at 23:00 or later go from about 39 to 42 a year each. Its heaviest week is 42h 30m, against today’s 43h 50m. Every closing shift is 30 to 45 minutes shorter. Six shift times are new. It is on the shortlist with In Step (30 October 2026), and against it has the same run, weekends, weeks on one shift time, late finishes and leave. What it has that In Step has not: fewer long days — 28 shifts a year each over 8h 30m against In Step’s 42, its weekday earlies over 8h 30m (all 9h 00m) coming about 20 times a year against In Step’s 40 (8h 45m and 8h 55m) — the closer weekday fit (29.1 against 29.8) and no new Saturday time. What it gives up: today’s 13:45, a Saturday closer of 8h 40m against In Step’s 8h 10m, a weaker Saturday fit (12.7 against 9.6), and less even weeks (24h 30m to 42h 30m, against 25h 30m to 41h 05m).</a:t>
+              <a:t>This is the case in one slide. It meets every December staffing rule and keeps the shift times people already work wherever that cost little — nine of its fifteen are worked today, and none on a Saturday is new. Nobody works more than five days in a row on the fixed rota, where today it is seven; a cover week placed badly, with its Sunday worked as overtime, can make it seven, never more. Every working week is all earlies or all lates, and 18 of the 21 keep one shift time Monday to Friday; today seven weeks in 16 do both. Its seven full weekends off in 26 weeks are never more than five weeks apart, which is as close as the five cover weeks allow; today it is four in 20, up to seven weeks apart. The honest costs: its new weekday early, 07:00–16:00, is 9 hours, about 20 a year each, where today no early is over 8h 30m; and late finishes, the smallest rise possible — the December staffing needs three to the close every day, and only those three finish after 23:00, so finishes at 23:00 or later go from about 39 to 42 a year each. Its heaviest week is 42h 30m, against today’s 43h 50m. Every closing shift is 30 to 45 minutes shorter. Six shift times are new. It is on the shortlist with In Step (30 October 2026), and against it has the same run, weekends, weeks on one shift time, late finishes and leave. What it has that In Step has not: fewer long days — 28 shifts a year each over 8h 30m against In Step’s 42, its weekday earlies over 8h 30m (all 9h 00m) coming about 20 times a year against In Step’s 40 (8h 45m and 8h 55m) — the closer weekday fit (29.1 against 29.8) and no new Saturday time. What it gives up: today’s 13:45, a Saturday closer of 8h 40m against In Step’s 8h 10m, a weaker Saturday fit (12.7 against 9.6), and less even weeks (24h 30m to 42h 30m, against 25h 30m to 41h 05m).</a:t>
             </a:r>
             <a:endParaRPr lang="en-US" dirty="0"/>
           </a:p>
@@ -5706,7 +5706,7 @@
                 <a:ea typeface="Inter" pitchFamily="34" charset="-122"/>
                 <a:cs typeface="Inter" pitchFamily="34" charset="-120"/>
               </a:rPr>
-              <a:t>0</a:t>
+              <a:t>0 (up to 1)</a:t>
             </a:r>
             <a:endParaRPr lang="en-US" sz="1800" dirty="0"/>
           </a:p>
@@ -5850,7 +5850,7 @@
                 <a:ea typeface="Inter" pitchFamily="34" charset="-122"/>
                 <a:cs typeface="Inter" pitchFamily="34" charset="-120"/>
               </a:rPr>
-              <a:t>5 (up to 6)</a:t>
+              <a:t>5 (up to 7)</a:t>
             </a:r>
             <a:endParaRPr lang="en-US" sz="1800" dirty="0"/>
           </a:p>
@@ -6456,7 +6456,7 @@
                 <a:ea typeface="Inter" pitchFamily="34" charset="-122"/>
                 <a:cs typeface="Inter" pitchFamily="34" charset="-120"/>
               </a:rPr>
-              <a:t>Both shortlisted: all 9 December rules and no avoidable fatigue warning</a:t>
+              <a:t>Both shortlisted: all 9 December rules; no avoidable fatigue warning, fixed rota</a:t>
             </a:r>
             <a:endParaRPr lang="en-US" sz="1500" dirty="0"/>
           </a:p>

--- a/docs/links-26/presentations/Short-Run-for-managers.pptx
+++ b/docs/links-26/presentations/Short-Run-for-managers.pptx
@@ -1018,7 +1018,7 @@
           <a:p>
             <a:r>
               <a:rPr lang="en-US" dirty="0"/>
-              <a:t>The nine rules are the December 2026 rules, as confirmed verbally on 29 September 2026: at least four at the open, three to the close, five after 22:00, 10 on a Sunday, the ticket office in fixed pairs, two on the floor at all times, handovers, 8–9 hour Sundays and no more shift times than today. Behind them sit three flexible rules that are aimed for when designing but not scored on: 14 on a Saturday, five cover weeks as evenly spaced as 26 weeks allow, and weekday closers starting at 15:45. Short Run meets all three. It also stays under the ceiling of 219 contracted days a year set on 1 October 2026, at 218.6.</a:t>
+              <a:t>The nine rules are the December 2026 rules, as confirmed verbally on 29 September 2026: at least four at the open, three to the close, five after 22:00, 10 on a Sunday, the ticket office in fixed pairs, two on the floor at all times, handovers, 8–9 hour Sundays and no more shift times than today. Behind them sit three flexible rules that are aimed for when designing but not scored on: 14 on a Saturday, five cover weeks as evenly spaced as 26 weeks allow, and weekday closers starting at 15:45 or later. Short Run meets all three. It also stays under the ceiling of 219 contracted days a year set on 1 October 2026, at 218.6.</a:t>
             </a:r>
             <a:endParaRPr lang="en-US" dirty="0"/>
           </a:p>
@@ -1106,7 +1106,7 @@
           <a:p>
             <a:r>
               <a:rPr lang="en-US" dirty="0"/>
-              <a:t>Today’s link meets 4 of the 9 December rules; Short Run meets all 9, and the three flexible ones as well (14 on a Saturday, evenly spaced cover weeks, 15:45 weekday closers). Someone finishing at exactly 22:00 is not counted as still on after 22:00. The floor figure leaves out the ticket office, except its second person at the quiet ends of the day. Three to the close every day is the minimum, and Short Run rosters exactly that, which is what keeps its late finishes down.</a:t>
+              <a:t>Today’s link meets 4 of the 9 December rules; Short Run meets all 9, and the three flexible ones as well (14 on a Saturday, evenly spaced cover weeks, weekday closers from 15:45). Someone finishing at exactly 22:00 is not counted as still on after 22:00. The floor figure leaves out the ticket office, except its second person at the quiet ends of the day. Three to the close every day is the minimum, and Short Run rosters exactly that, which is what keeps its late finishes down.</a:t>
             </a:r>
             <a:endParaRPr lang="en-US" dirty="0"/>
           </a:p>
@@ -1458,7 +1458,7 @@
           <a:p>
             <a:r>
               <a:rPr lang="en-US" dirty="0"/>
-              <a:t>This is the case in one slide. It meets every December staffing rule and keeps the shift times people already work wherever that cost little — nine of its fifteen are worked today, and none on a Saturday is new. Nobody works more than five days in a row on the fixed rota, where today it is seven; a cover week placed badly, with its Sunday worked as overtime, can make it seven, never more. Every working week is all earlies or all lates, and 18 of the 21 keep one shift time Monday to Friday; today seven weeks in 16 do both. Its seven full weekends off in 26 weeks are never more than five weeks apart, which is as close as the five cover weeks allow; today it is four in 20, up to seven weeks apart. The honest costs: its new weekday early, 07:00–16:00, is 9 hours, about 20 a year each, where today no early is over 8h 30m; and late finishes, the smallest rise possible — the December staffing needs three to the close every day, and only those three finish after 23:00, so finishes at 23:00 or later go from about 39 to 42 a year each. Its heaviest week is 42h 30m, against today’s 43h 50m. Every closing shift is 30 to 45 minutes shorter. Six shift times are new. It is on the shortlist with In Step (30 October 2026), and against it has the same run, weekends, weeks on one shift time, late finishes and leave. What it has that In Step has not: fewer long days — 28 shifts a year each over 8h 30m against In Step’s 42, its weekday earlies over 8h 30m (all 9h 00m) coming about 20 times a year against In Step’s 40 (8h 45m and 8h 55m) — the closer weekday fit (29.1 against 29.8) and no new Saturday time. What it gives up: today’s 13:45, a Saturday closer of 8h 40m against In Step’s 8h 10m, a weaker Saturday fit (12.7 against 9.6), and less even weeks (24h 30m to 42h 30m, against 25h 30m to 41h 05m).</a:t>
+              <a:t>This is the case in one slide. It meets every December staffing rule and keeps the shift times people already work wherever that cost little — nine of its fifteen are worked today, and none on a Saturday is new. Nobody works more than five days in a row on the fixed rota, where today it is seven; a cover week placed badly, with its Sunday worked as overtime, can make it seven, never more. Every working week is all earlies or all lates, and 18 of the 21 keep one shift time Monday to Friday; today seven weeks in 16 do both. Its seven full weekends off in 26 weeks are never more than five weeks apart, which is as close as the five cover weeks allow; today it is four in 20, up to seven weeks apart. The honest costs: its new weekday early, 07:00–16:00, is 9 hours, about 20 a year each, where today no early is over 8h 30m; and late finishes, the smallest rise possible — the December staffing needs three to the close every day, and only those three finish after 23:00, so finishes at 23:00 or later go from about 39 to 42 a year each. Its heaviest week is 42h 30m, against today’s 43h 50m. Every closing shift is 30 to 45 minutes shorter. Six shift times are new. It is on the shortlist with Even Step, the recommended design (31 October 2026), and In Step (30 October 2026), and against both has the same run, weekends, weeks on one shift time, late finishes and leave. What it has that neither has: the closest weekday fit to the trains (29.1, against In Step’s 29.8 and Even Step’s 32.6), the shortest weekday lates (8h 00m on average, closers aside, against 8h 12m and 8h 27m) and no new Saturday time. Against In Step it also has fewer long days — 28 shifts a year each over 8h 30m against In Step’s 42, its weekday earlies over 8h 30m (all 9h 00m) coming about 20 times a year against In Step’s 40 (8h 45m and 8h 55m); Even Step has no shift over 8h 30m Monday to Saturday, and over 8h 30m at all only its Sunday 09:00–18:00, about twice a year each. Its working day moves less from one week to the next than Even Step’s (1h 13m on average, against 1h 31m; In Step’s is 1h 13m too). What it gives up: today’s 13:45, which both the others keep on every weekday; a Saturday closer of 8h 40m, against their 8h 10m; a weaker Saturday fit (12.7, against In Step’s 9.6 and Even Step’s 10.0); and less even weeks (24h 30m to 42h 30m, against In Step’s 25h 30m to 41h 05m and Even Step’s 25h 30m to 41h 30m).</a:t>
             </a:r>
             <a:endParaRPr lang="en-US" dirty="0"/>
           </a:p>
@@ -6353,7 +6353,7 @@
                 <a:ea typeface="Inter" pitchFamily="34" charset="-122"/>
                 <a:cs typeface="Inter" pitchFamily="34" charset="-120"/>
               </a:rPr>
-              <a:t>What both shortlisted links give, what this one adds, and what it costs</a:t>
+              <a:t>What all three shortlisted links give, what this one adds, and what it costs</a:t>
             </a:r>
             <a:endParaRPr lang="en-US" sz="1500" dirty="0"/>
           </a:p>
@@ -6456,7 +6456,7 @@
                 <a:ea typeface="Inter" pitchFamily="34" charset="-122"/>
                 <a:cs typeface="Inter" pitchFamily="34" charset="-120"/>
               </a:rPr>
-              <a:t>Both shortlisted: all 9 December rules; no avoidable fatigue warning, fixed rota</a:t>
+              <a:t>All three shortlisted: all 9 December rules; no avoidable fatigue warning, fixed rota</a:t>
             </a:r>
             <a:endParaRPr lang="en-US" sz="1500" dirty="0"/>
           </a:p>
@@ -6559,7 +6559,7 @@
                 <a:ea typeface="Inter" pitchFamily="34" charset="-122"/>
                 <a:cs typeface="Inter" pitchFamily="34" charset="-120"/>
               </a:rPr>
-              <a:t>Both shortlisted: about 14 full weekends off a year (today 10), at most 5 apart</a:t>
+              <a:t>All three shortlisted: about 14 full weekends off a year (today 10), at most 5 apart</a:t>
             </a:r>
             <a:endParaRPr lang="en-US" sz="1500" dirty="0"/>
           </a:p>
@@ -6662,7 +6662,7 @@
                 <a:ea typeface="Inter" pitchFamily="34" charset="-122"/>
                 <a:cs typeface="Inter" pitchFamily="34" charset="-120"/>
               </a:rPr>
-              <a:t>Both shortlisted: no shift over 9 hours, and every closing shift shorter</a:t>
+              <a:t>All three shortlisted: no shift over 9 hours, and every closing shift shorter</a:t>
             </a:r>
             <a:endParaRPr lang="en-US" sz="1500" dirty="0"/>
           </a:p>
@@ -6765,7 +6765,7 @@
                 <a:ea typeface="Inter" pitchFamily="34" charset="-122"/>
                 <a:cs typeface="Inter" pitchFamily="34" charset="-120"/>
               </a:rPr>
-              <a:t>This one adds: half the long earlies, a closer weekday fit, no new Saturday time</a:t>
+              <a:t>This one adds: the closest weekday fit, and no new Saturday time</a:t>
             </a:r>
             <a:endParaRPr lang="en-US" sz="1500" dirty="0"/>
           </a:p>

--- a/docs/links-26/presentations/Short-Run-for-managers.pptx
+++ b/docs/links-26/presentations/Short-Run-for-managers.pptx
@@ -1458,7 +1458,7 @@
           <a:p>
             <a:r>
               <a:rPr lang="en-US" dirty="0"/>
-              <a:t>This is the case in one slide. It meets every December staffing rule and keeps the shift times people already work wherever that cost little — nine of its fifteen are worked today, and none on a Saturday is new. Nobody works more than five days in a row on the fixed rota, where today it is seven; a cover week placed badly, with its Sunday worked as overtime, can make it seven, never more. Every working week is all earlies or all lates, and 18 of the 21 keep one shift time Monday to Friday; today seven weeks in 16 do both. Its seven full weekends off in 26 weeks are never more than five weeks apart, which is as close as the five cover weeks allow; today it is four in 20, up to seven weeks apart. The honest costs: its new weekday early, 07:00–16:00, is 9 hours, about 20 a year each, where today no early is over 8h 30m; and late finishes, the smallest rise possible — the December staffing needs three to the close every day, and only those three finish after 23:00, so finishes at 23:00 or later go from about 39 to 42 a year each. Its heaviest week is 42h 30m, against today’s 43h 50m. Every closing shift is 30 to 45 minutes shorter. Six shift times are new. It is on the shortlist with Even Step, the recommended design (31 October 2026), and In Step (30 October 2026), and against both has the same run, weekends, weeks on one shift time, late finishes and leave. What it has that neither has: the closest weekday fit to the trains (29.1, against In Step’s 29.8 and Even Step’s 32.6), the shortest weekday lates (8h 00m on average, closers aside, against 8h 12m and 8h 27m) and no new Saturday time. Against In Step it also has fewer long days — 28 shifts a year each over 8h 30m against In Step’s 42, its weekday earlies over 8h 30m (all 9h 00m) coming about 20 times a year against In Step’s 40 (8h 45m and 8h 55m); Even Step has no shift over 8h 30m Monday to Saturday, and over 8h 30m at all only its Sunday 09:00–18:00, about twice a year each. Its working day moves less from one week to the next than Even Step’s (1h 13m on average, against 1h 31m; In Step’s is 1h 13m too). What it gives up: today’s 13:45, which both the others keep on every weekday; a Saturday closer of 8h 40m, against their 8h 10m; a weaker Saturday fit (12.7, against In Step’s 9.6 and Even Step’s 10.0); and less even weeks (24h 30m to 42h 30m, against In Step’s 25h 30m to 41h 05m and Even Step’s 25h 30m to 41h 30m).</a:t>
+              <a:t>This is the case in one slide. It meets every December staffing rule and keeps the shift times people already work wherever that cost little — nine of its fifteen are worked today, and none on a Saturday is new. Nobody works more than five days in a row on the fixed rota, where today it is seven; a cover week placed badly, with its Sunday worked as overtime, can make it seven, never more. Every working week is all earlies or all lates, and 18 of the 21 keep one shift time Monday to Friday; today seven weeks in 16 do both. Its seven full weekends off in 26 weeks are never more than five weeks apart, which is as close as the five cover weeks allow; today it is four in 20, up to seven weeks apart. The honest costs: its new weekday early, 07:00–16:00, is 9 hours, about 20 a year each, where today no early is over 8h 30m; and late finishes, the smallest rise possible — the December staffing needs three to the close every day, and only those three finish after 23:00, so finishes at 23:00 or later go from about 39 to 42 a year each. Its heaviest week is 42h 30m, against today’s 43h 50m. Every closing shift is 30 to 45 minutes shorter. Six shift times are new. It is on the shortlist with Even Step, the recommended design (31 October 2026), and In Step (30 October 2026), and against both has the same run, weekends, weeks on one shift time, late finishes and leave. What it has that neither has: the closest weekday fit to the trains (29.1, against In Step’s 29.8 and Even Step’s 32.6), the shortest weekday lates (8h 00m on average, closers aside, against 8h 12m and 8h 27m) and no new Saturday time. Against In Step it also has fewer long days — 26 shifts a year each over 8h 30m Monday to Saturday against In Step’s 40, its weekday earlies over 8h 30m (all 9h 00m) coming about 20 times a year against In Step’s 40 (8h 45m and 8h 55m); Even Step has no shift over 8h 30m Monday to Saturday, and over 8h 30m at all only its Sunday 09:00–18:00, about twice a year each. Its working day moves less from one week to the next than Even Step’s (1h 13m on average, against 1h 31m; In Step’s is 1h 13m too). What it gives up: today’s 13:45, which both the others keep on every weekday; a Saturday closer of 8h 40m, against their 8h 10m; a weaker Saturday fit (12.7, against In Step’s 9.6 and Even Step’s 10.0); and less even weeks (24h 30m to 42h 30m, against In Step’s 25h 30m to 41h 05m and Even Step’s 25h 30m to 41h 30m).</a:t>
             </a:r>
             <a:endParaRPr lang="en-US" dirty="0"/>
           </a:p>

--- a/docs/links-26/presentations/Short-Run-for-managers.pptx
+++ b/docs/links-26/presentations/Short-Run-for-managers.pptx
@@ -2682,7 +2682,7 @@
                 <a:ea typeface="Inter" pitchFamily="34" charset="-122"/>
                 <a:cs typeface="Inter" pitchFamily="34" charset="-120"/>
               </a:rPr>
-              <a:t>today’s link: 4</a:t>
+              <a:t>today 4</a:t>
             </a:r>
             <a:endParaRPr lang="en-US" sz="1300" dirty="0"/>
           </a:p>
@@ -3156,7 +3156,7 @@
                 <a:ea typeface="Inter" pitchFamily="34" charset="-122"/>
                 <a:cs typeface="Inter" pitchFamily="34" charset="-120"/>
               </a:rPr>
-              <a:t>today: 20</a:t>
+              <a:t>today 20</a:t>
             </a:r>
             <a:endParaRPr lang="en-US" sz="1300" dirty="0"/>
           </a:p>
@@ -4708,11 +4708,11 @@
         <p:spPr>
           <a:xfrm>
             <a:off x="457200" y="1801368"/>
-            <a:ext cx="8229600" cy="365760"/>
+            <a:ext cx="8229600" cy="461176"/>
           </a:xfrm>
           <a:prstGeom prst="roundRect">
             <a:avLst>
-              <a:gd name="adj" fmla="val 11538"/>
+              <a:gd name="adj" fmla="val 9151"/>
             </a:avLst>
           </a:prstGeom>
           <a:solidFill>
@@ -4735,7 +4735,7 @@
         <p:spPr>
           <a:xfrm>
             <a:off x="640080" y="1801368"/>
-            <a:ext cx="4023360" cy="365760"/>
+            <a:ext cx="4023360" cy="461176"/>
           </a:xfrm>
           <a:prstGeom prst="rect">
             <a:avLst/>
@@ -4774,7 +4774,7 @@
         <p:spPr>
           <a:xfrm>
             <a:off x="4663440" y="1801368"/>
-            <a:ext cx="2011680" cy="365760"/>
+            <a:ext cx="2011680" cy="461176"/>
           </a:xfrm>
           <a:prstGeom prst="rect">
             <a:avLst/>
@@ -4813,7 +4813,7 @@
         <p:spPr>
           <a:xfrm>
             <a:off x="6675120" y="1801368"/>
-            <a:ext cx="2011680" cy="365760"/>
+            <a:ext cx="2011680" cy="461176"/>
           </a:xfrm>
           <a:prstGeom prst="rect">
             <a:avLst/>
@@ -4851,12 +4851,12 @@
         </p:nvSpPr>
         <p:spPr>
           <a:xfrm>
-            <a:off x="457200" y="2240280"/>
-            <a:ext cx="8229600" cy="365760"/>
+            <a:off x="457200" y="2354779"/>
+            <a:ext cx="8229600" cy="461176"/>
           </a:xfrm>
           <a:prstGeom prst="roundRect">
             <a:avLst>
-              <a:gd name="adj" fmla="val 11538"/>
+              <a:gd name="adj" fmla="val 9151"/>
             </a:avLst>
           </a:prstGeom>
           <a:solidFill>
@@ -4878,8 +4878,8 @@
         </p:nvSpPr>
         <p:spPr>
           <a:xfrm>
-            <a:off x="640080" y="2240280"/>
-            <a:ext cx="4023360" cy="365760"/>
+            <a:off x="640080" y="2354779"/>
+            <a:ext cx="4023360" cy="461176"/>
           </a:xfrm>
           <a:prstGeom prst="rect">
             <a:avLst/>
@@ -4917,8 +4917,8 @@
         </p:nvSpPr>
         <p:spPr>
           <a:xfrm>
-            <a:off x="4663440" y="2240280"/>
-            <a:ext cx="2011680" cy="365760"/>
+            <a:off x="4663440" y="2354779"/>
+            <a:ext cx="2011680" cy="461176"/>
           </a:xfrm>
           <a:prstGeom prst="rect">
             <a:avLst/>
@@ -4956,8 +4956,8 @@
         </p:nvSpPr>
         <p:spPr>
           <a:xfrm>
-            <a:off x="6675120" y="2240280"/>
-            <a:ext cx="2011680" cy="365760"/>
+            <a:off x="6675120" y="2354779"/>
+            <a:ext cx="2011680" cy="461176"/>
           </a:xfrm>
           <a:prstGeom prst="rect">
             <a:avLst/>
@@ -4995,12 +4995,12 @@
         </p:nvSpPr>
         <p:spPr>
           <a:xfrm>
-            <a:off x="457200" y="2679192"/>
-            <a:ext cx="8229600" cy="365760"/>
+            <a:off x="457200" y="2908190"/>
+            <a:ext cx="8229600" cy="461176"/>
           </a:xfrm>
           <a:prstGeom prst="roundRect">
             <a:avLst>
-              <a:gd name="adj" fmla="val 11538"/>
+              <a:gd name="adj" fmla="val 9151"/>
             </a:avLst>
           </a:prstGeom>
           <a:solidFill>
@@ -5022,8 +5022,8 @@
         </p:nvSpPr>
         <p:spPr>
           <a:xfrm>
-            <a:off x="640080" y="2679192"/>
-            <a:ext cx="4023360" cy="365760"/>
+            <a:off x="640080" y="2908190"/>
+            <a:ext cx="4023360" cy="461176"/>
           </a:xfrm>
           <a:prstGeom prst="rect">
             <a:avLst/>
@@ -5061,8 +5061,8 @@
         </p:nvSpPr>
         <p:spPr>
           <a:xfrm>
-            <a:off x="4663440" y="2679192"/>
-            <a:ext cx="2011680" cy="365760"/>
+            <a:off x="4663440" y="2908190"/>
+            <a:ext cx="2011680" cy="461176"/>
           </a:xfrm>
           <a:prstGeom prst="rect">
             <a:avLst/>
@@ -5100,8 +5100,8 @@
         </p:nvSpPr>
         <p:spPr>
           <a:xfrm>
-            <a:off x="6675120" y="2679192"/>
-            <a:ext cx="2011680" cy="365760"/>
+            <a:off x="6675120" y="2908190"/>
+            <a:ext cx="2011680" cy="461176"/>
           </a:xfrm>
           <a:prstGeom prst="rect">
             <a:avLst/>
@@ -5139,12 +5139,12 @@
         </p:nvSpPr>
         <p:spPr>
           <a:xfrm>
-            <a:off x="457200" y="3118104"/>
-            <a:ext cx="8229600" cy="365760"/>
+            <a:off x="457200" y="3461601"/>
+            <a:ext cx="8229600" cy="461176"/>
           </a:xfrm>
           <a:prstGeom prst="roundRect">
             <a:avLst>
-              <a:gd name="adj" fmla="val 11538"/>
+              <a:gd name="adj" fmla="val 9151"/>
             </a:avLst>
           </a:prstGeom>
           <a:solidFill>
@@ -5166,8 +5166,8 @@
         </p:nvSpPr>
         <p:spPr>
           <a:xfrm>
-            <a:off x="640080" y="3118104"/>
-            <a:ext cx="4023360" cy="365760"/>
+            <a:off x="640080" y="3461601"/>
+            <a:ext cx="4023360" cy="461176"/>
           </a:xfrm>
           <a:prstGeom prst="rect">
             <a:avLst/>
@@ -5205,8 +5205,8 @@
         </p:nvSpPr>
         <p:spPr>
           <a:xfrm>
-            <a:off x="4663440" y="3118104"/>
-            <a:ext cx="2011680" cy="365760"/>
+            <a:off x="4663440" y="3461601"/>
+            <a:ext cx="2011680" cy="461176"/>
           </a:xfrm>
           <a:prstGeom prst="rect">
             <a:avLst/>
@@ -5244,8 +5244,8 @@
         </p:nvSpPr>
         <p:spPr>
           <a:xfrm>
-            <a:off x="6675120" y="3118104"/>
-            <a:ext cx="2011680" cy="365760"/>
+            <a:off x="6675120" y="3461601"/>
+            <a:ext cx="2011680" cy="461176"/>
           </a:xfrm>
           <a:prstGeom prst="rect">
             <a:avLst/>
@@ -5577,11 +5577,11 @@
         <p:spPr>
           <a:xfrm>
             <a:off x="457200" y="1801368"/>
-            <a:ext cx="8229600" cy="365760"/>
+            <a:ext cx="8229600" cy="461176"/>
           </a:xfrm>
           <a:prstGeom prst="roundRect">
             <a:avLst>
-              <a:gd name="adj" fmla="val 11538"/>
+              <a:gd name="adj" fmla="val 9151"/>
             </a:avLst>
           </a:prstGeom>
           <a:solidFill>
@@ -5604,7 +5604,7 @@
         <p:spPr>
           <a:xfrm>
             <a:off x="640080" y="1801368"/>
-            <a:ext cx="4023360" cy="365760"/>
+            <a:ext cx="4023360" cy="461176"/>
           </a:xfrm>
           <a:prstGeom prst="rect">
             <a:avLst/>
@@ -5643,7 +5643,7 @@
         <p:spPr>
           <a:xfrm>
             <a:off x="4663440" y="1801368"/>
-            <a:ext cx="2011680" cy="365760"/>
+            <a:ext cx="2011680" cy="461176"/>
           </a:xfrm>
           <a:prstGeom prst="rect">
             <a:avLst/>
@@ -5682,7 +5682,7 @@
         <p:spPr>
           <a:xfrm>
             <a:off x="6675120" y="1801368"/>
-            <a:ext cx="2011680" cy="365760"/>
+            <a:ext cx="2011680" cy="461176"/>
           </a:xfrm>
           <a:prstGeom prst="rect">
             <a:avLst/>
@@ -5720,12 +5720,12 @@
         </p:nvSpPr>
         <p:spPr>
           <a:xfrm>
-            <a:off x="457200" y="2240280"/>
-            <a:ext cx="8229600" cy="365760"/>
+            <a:off x="457200" y="2354779"/>
+            <a:ext cx="8229600" cy="461176"/>
           </a:xfrm>
           <a:prstGeom prst="roundRect">
             <a:avLst>
-              <a:gd name="adj" fmla="val 11538"/>
+              <a:gd name="adj" fmla="val 9151"/>
             </a:avLst>
           </a:prstGeom>
           <a:solidFill>
@@ -5747,8 +5747,8 @@
         </p:nvSpPr>
         <p:spPr>
           <a:xfrm>
-            <a:off x="640080" y="2240280"/>
-            <a:ext cx="4023360" cy="365760"/>
+            <a:off x="640080" y="2354779"/>
+            <a:ext cx="4023360" cy="461176"/>
           </a:xfrm>
           <a:prstGeom prst="rect">
             <a:avLst/>
@@ -5786,8 +5786,8 @@
         </p:nvSpPr>
         <p:spPr>
           <a:xfrm>
-            <a:off x="4663440" y="2240280"/>
-            <a:ext cx="2011680" cy="365760"/>
+            <a:off x="4663440" y="2354779"/>
+            <a:ext cx="2011680" cy="461176"/>
           </a:xfrm>
           <a:prstGeom prst="rect">
             <a:avLst/>
@@ -5825,8 +5825,8 @@
         </p:nvSpPr>
         <p:spPr>
           <a:xfrm>
-            <a:off x="6675120" y="2240280"/>
-            <a:ext cx="2011680" cy="365760"/>
+            <a:off x="6675120" y="2354779"/>
+            <a:ext cx="2011680" cy="461176"/>
           </a:xfrm>
           <a:prstGeom prst="rect">
             <a:avLst/>
@@ -5864,12 +5864,12 @@
         </p:nvSpPr>
         <p:spPr>
           <a:xfrm>
-            <a:off x="457200" y="2679192"/>
-            <a:ext cx="8229600" cy="365760"/>
+            <a:off x="457200" y="2908190"/>
+            <a:ext cx="8229600" cy="461176"/>
           </a:xfrm>
           <a:prstGeom prst="roundRect">
             <a:avLst>
-              <a:gd name="adj" fmla="val 11538"/>
+              <a:gd name="adj" fmla="val 9151"/>
             </a:avLst>
           </a:prstGeom>
           <a:solidFill>
@@ -5891,8 +5891,8 @@
         </p:nvSpPr>
         <p:spPr>
           <a:xfrm>
-            <a:off x="640080" y="2679192"/>
-            <a:ext cx="4023360" cy="365760"/>
+            <a:off x="640080" y="2908190"/>
+            <a:ext cx="4023360" cy="461176"/>
           </a:xfrm>
           <a:prstGeom prst="rect">
             <a:avLst/>
@@ -5930,8 +5930,8 @@
         </p:nvSpPr>
         <p:spPr>
           <a:xfrm>
-            <a:off x="4663440" y="2679192"/>
-            <a:ext cx="2011680" cy="365760"/>
+            <a:off x="4663440" y="2908190"/>
+            <a:ext cx="2011680" cy="461176"/>
           </a:xfrm>
           <a:prstGeom prst="rect">
             <a:avLst/>
@@ -5969,8 +5969,8 @@
         </p:nvSpPr>
         <p:spPr>
           <a:xfrm>
-            <a:off x="6675120" y="2679192"/>
-            <a:ext cx="2011680" cy="365760"/>
+            <a:off x="6675120" y="2908190"/>
+            <a:ext cx="2011680" cy="461176"/>
           </a:xfrm>
           <a:prstGeom prst="rect">
             <a:avLst/>
@@ -6008,12 +6008,12 @@
         </p:nvSpPr>
         <p:spPr>
           <a:xfrm>
-            <a:off x="457200" y="3118104"/>
-            <a:ext cx="8229600" cy="365760"/>
+            <a:off x="457200" y="3461601"/>
+            <a:ext cx="8229600" cy="461176"/>
           </a:xfrm>
           <a:prstGeom prst="roundRect">
             <a:avLst>
-              <a:gd name="adj" fmla="val 11538"/>
+              <a:gd name="adj" fmla="val 9151"/>
             </a:avLst>
           </a:prstGeom>
           <a:solidFill>
@@ -6035,8 +6035,8 @@
         </p:nvSpPr>
         <p:spPr>
           <a:xfrm>
-            <a:off x="640080" y="3118104"/>
-            <a:ext cx="4023360" cy="365760"/>
+            <a:off x="640080" y="3461601"/>
+            <a:ext cx="4023360" cy="461176"/>
           </a:xfrm>
           <a:prstGeom prst="rect">
             <a:avLst/>
@@ -6074,8 +6074,8 @@
         </p:nvSpPr>
         <p:spPr>
           <a:xfrm>
-            <a:off x="4663440" y="3118104"/>
-            <a:ext cx="2011680" cy="365760"/>
+            <a:off x="4663440" y="3461601"/>
+            <a:ext cx="2011680" cy="461176"/>
           </a:xfrm>
           <a:prstGeom prst="rect">
             <a:avLst/>
@@ -6113,8 +6113,8 @@
         </p:nvSpPr>
         <p:spPr>
           <a:xfrm>
-            <a:off x="6675120" y="3118104"/>
-            <a:ext cx="2011680" cy="365760"/>
+            <a:off x="6675120" y="3461601"/>
+            <a:ext cx="2011680" cy="461176"/>
           </a:xfrm>
           <a:prstGeom prst="rect">
             <a:avLst/>
@@ -6868,7 +6868,7 @@
                 <a:ea typeface="Inter" pitchFamily="34" charset="-122"/>
                 <a:cs typeface="Inter" pitchFamily="34" charset="-120"/>
               </a:rPr>
-              <a:t>9 of 15 shift times worked today; 6 new, four shorter versions of today’s lates</a:t>
+              <a:t>9 of 15 shift times worked today; 6 new, 4 of them shorter versions of today’s lates</a:t>
             </a:r>
             <a:endParaRPr lang="en-US" sz="1500" dirty="0"/>
           </a:p>

--- a/docs/links-26/presentations/Short-Run-for-managers.pptx
+++ b/docs/links-26/presentations/Short-Run-for-managers.pptx
@@ -1106,7 +1106,7 @@
           <a:p>
             <a:r>
               <a:rPr lang="en-US" dirty="0"/>
-              <a:t>Today’s link meets 4 of the 9 December rules; Short Run meets all 9, and the three flexible ones as well (14 on a Saturday, evenly spaced cover weeks, weekday closers from 15:45). Someone finishing at exactly 22:00 is not counted as still on after 22:00. The floor figure leaves out the ticket office, except its second person at the quiet ends of the day. Three to the close every day is the minimum, and Short Run rosters exactly that, which is what keeps its late finishes down.</a:t>
+              <a:t>Today’s link meets 4 of the 9 December rules; Short Run meets all 9, and the three flexible ones as well (14 on a Saturday, evenly spaced cover weeks, weekday closers from 15:45). Someone finishing at exactly 22:00 is not counted as still on after 22:00. The floor figure leaves out the ticket office, except at the quiet ends of the day, when one of each pair helps on the floor (on a Sunday both lates, until 15:00). Three to the close every day is the minimum, and Short Run rosters exactly that, which is what keeps its late finishes down.</a:t>
             </a:r>
             <a:endParaRPr lang="en-US" dirty="0"/>
           </a:p>
@@ -3515,7 +3515,7 @@
                 <a:ea typeface="Inter" pitchFamily="34" charset="-122"/>
                 <a:cs typeface="Inter" pitchFamily="34" charset="-120"/>
               </a:rPr>
-              <a:t>On duty during the day</a:t>
+              <a:t>On duty each day</a:t>
             </a:r>
             <a:endParaRPr lang="en-US" sz="1400" dirty="0"/>
           </a:p>
@@ -6559,7 +6559,7 @@
                 <a:ea typeface="Inter" pitchFamily="34" charset="-122"/>
                 <a:cs typeface="Inter" pitchFamily="34" charset="-120"/>
               </a:rPr>
-              <a:t>All three shortlisted: about 14 full weekends off a year (today 10), at most 5 apart</a:t>
+              <a:t>All three shortlisted: 14 full weekends off a year (today 10), at most 5 weeks apart</a:t>
             </a:r>
             <a:endParaRPr lang="en-US" sz="1500" dirty="0"/>
           </a:p>
@@ -6971,7 +6971,7 @@
                 <a:ea typeface="Inter" pitchFamily="34" charset="-122"/>
                 <a:cs typeface="Inter" pitchFamily="34" charset="-120"/>
               </a:rPr>
-              <a:t>Costs: 20 weekday earlies a year over 8h 30m; four weeks off 15 days, not 14</a:t>
+              <a:t>This one costs: an 8h 40m Saturday closer, and the heaviest week, 42h 30m</a:t>
             </a:r>
             <a:endParaRPr lang="en-US" sz="1500" dirty="0"/>
           </a:p>
@@ -7037,7 +7037,7 @@
                 <a:ea typeface="Inter" pitchFamily="34" charset="-122"/>
                 <a:cs typeface="Inter" pitchFamily="34" charset="-120"/>
               </a:rPr>
-              <a:t>Late finishes: 42 a year each (today 39) — the rules’ minimum. The colleague deck shows every cost openly.</a:t>
+              <a:t>All three: two more Saturdays a year, four weeks off for 15 days’ leave, and late finishes — 42 a year at 23:00 or later (today 39), 94 at 22:00 or later (today 78).</a:t>
             </a:r>
             <a:endParaRPr lang="en-US" sz="1400" dirty="0"/>
           </a:p>
@@ -7544,7 +7544,7 @@
                 <a:ea typeface="Inter" pitchFamily="34" charset="-122"/>
                 <a:cs typeface="Inter" pitchFamily="34" charset="-120"/>
               </a:rPr>
-              <a:t>Late finishes: 42 a year (today 39)</a:t>
+              <a:t>Late finishes: 42 a year at 23:00 or later (today 39), 94 at 22:00 or later (today 78)</a:t>
             </a:r>
             <a:endParaRPr lang="en-US" sz="1300" dirty="0"/>
           </a:p>
@@ -7610,7 +7610,7 @@
                 <a:ea typeface="Inter" pitchFamily="34" charset="-122"/>
                 <a:cs typeface="Inter" pitchFamily="34" charset="-120"/>
               </a:rPr>
-              <a:t>Best 14-day leave stretch 28 days, not 30</a:t>
+              <a:t>14 days’ leave: at best 28 days off, not 30</a:t>
             </a:r>
             <a:endParaRPr lang="en-US" sz="1300" dirty="0"/>
           </a:p>
@@ -7847,7 +7847,7 @@
                 <a:ea typeface="Inter" pitchFamily="34" charset="-122"/>
                 <a:cs typeface="Inter" pitchFamily="34" charset="-120"/>
               </a:rPr>
-              <a:t>Three things confirmed verbally, two decisions left, two points still open</a:t>
+              <a:t>Three things settled, two decisions left, two points still open</a:t>
             </a:r>
             <a:endParaRPr lang="en-US" sz="1500" dirty="0"/>
           </a:p>

--- a/docs/links-26/presentations/Short-Run-for-managers.pptx
+++ b/docs/links-26/presentations/Short-Run-for-managers.pptx
@@ -1106,7 +1106,7 @@
           <a:p>
             <a:r>
               <a:rPr lang="en-US" dirty="0"/>
-              <a:t>Today’s link meets 4 of the 9 December rules; Short Run meets all 9, and the three flexible ones as well (14 on a Saturday, evenly spaced cover weeks, weekday closers from 15:45). Someone finishing at exactly 22:00 is not counted as still on after 22:00. The floor figure leaves out the ticket office, except at the quiet ends of the day, when one of each pair helps on the floor (on a Sunday both lates, until 15:00). Three to the close every day is the minimum, and Short Run rosters exactly that, which is what keeps its late finishes down.</a:t>
+              <a:t>Today’s link meets 4 of the 9 December rules; Short Run meets all 9, and the three flexible ones as well (14 on a Saturday, evenly spaced cover weeks, weekday closers from 15:45). Someone finishing at exactly 22:00 is not counted as still on after 22:00. The floor figure leaves out the ticket office, except at the quiet ends of the day, when one of each pair helps on the floor — on a Sunday one early until 09:00, and both lates until 15:00, one of them again from 18:00. Three to the close every day is the minimum, and Short Run rosters exactly that, which is what keeps its late finishes down.</a:t>
             </a:r>
             <a:endParaRPr lang="en-US" dirty="0"/>
           </a:p>
@@ -1458,7 +1458,7 @@
           <a:p>
             <a:r>
               <a:rPr lang="en-US" dirty="0"/>
-              <a:t>This is the case in one slide. It meets every December staffing rule and keeps the shift times people already work wherever that cost little — nine of its fifteen are worked today, and none on a Saturday is new. Nobody works more than five days in a row on the fixed rota, where today it is seven; a cover week placed badly, with its Sunday worked as overtime, can make it seven, never more. Every working week is all earlies or all lates, and 18 of the 21 keep one shift time Monday to Friday; today seven weeks in 16 do both. Its seven full weekends off in 26 weeks are never more than five weeks apart, which is as close as the five cover weeks allow; today it is four in 20, up to seven weeks apart. The honest costs: its new weekday early, 07:00–16:00, is 9 hours, about 20 a year each, where today no early is over 8h 30m; and late finishes, the smallest rise possible — the December staffing needs three to the close every day, and only those three finish after 23:00, so finishes at 23:00 or later go from about 39 to 42 a year each. Its heaviest week is 42h 30m, against today’s 43h 50m. Every closing shift is 30 to 45 minutes shorter. Six shift times are new. It is on the shortlist with Even Step, the recommended design (31 October 2026), and In Step (30 October 2026), and against both has the same run, weekends, weeks on one shift time, late finishes and leave. What it has that neither has: the closest weekday fit to the trains (29.1, against In Step’s 29.8 and Even Step’s 32.6), the shortest weekday lates (8h 00m on average, closers aside, against 8h 12m and 8h 27m) and no new Saturday time. Against In Step it also has fewer long days — 26 shifts a year each over 8h 30m Monday to Saturday against In Step’s 40, its weekday earlies over 8h 30m (all 9h 00m) coming about 20 times a year against In Step’s 40 (8h 45m and 8h 55m); Even Step has no shift over 8h 30m Monday to Saturday, and over 8h 30m at all only its Sunday 09:00–18:00, about twice a year each. Its working day moves less from one week to the next than Even Step’s (1h 13m on average, against 1h 31m; In Step’s is 1h 13m too). What it gives up: today’s 13:45, which both the others keep on every weekday; a Saturday closer of 8h 40m, against their 8h 10m; a weaker Saturday fit (12.7, against In Step’s 9.6 and Even Step’s 10.0); and less even weeks (24h 30m to 42h 30m, against In Step’s 25h 30m to 41h 05m and Even Step’s 25h 30m to 41h 30m).</a:t>
+              <a:t>This is the case in one slide. It meets every December staffing rule and keeps the shift times people already work wherever that cost little — nine of its fifteen are worked today, and none on a Saturday is new. Nobody works more than five days in a row on the fixed rota, where today it is seven; a cover week placed badly, with its Sunday worked as overtime, can make it seven, never more. Every working week is all earlies or all lates, and 18 of the 21 keep one shift time Monday to Friday; today seven weeks in 16 do both. Its seven full weekends off in 26 weeks are never more than five weeks apart, which is as close as the five cover weeks allow; today it is four in 20, up to seven weeks apart. The honest costs: its new weekday early, 07:00–16:00, is 9 hours, about 20 a year each, where today no early is over 8h 30m; and late finishes, the smallest rise possible — the December staffing needs three to the close every day, and only those three finish after 23:00, so finishes at 23:00 or later go from about 39 to 42 a year each. Its heaviest week, Monday to Saturday, is 42h 30m, against today’s 43h 50m. Every closing shift is 30 to 45 minutes shorter. Six shift times are new. It is on the shortlist with Even Step, the recommended design (31 October 2026), and In Step (30 October 2026), and against both has the same run, weekends, weeks on one shift time, late finishes and leave. What it has that neither has: the closest weekday fit to the trains (29.1, against In Step’s 29.8 and Even Step’s 32.6), the shortest weekday lates (8h 00m on average, closers aside, against 8h 12m and 8h 27m) and no new Saturday time. Against In Step it also has fewer long days — 26 shifts a year each over 8h 30m Monday to Saturday against In Step’s 40, its weekday earlies over 8h 30m (all 9h 00m) coming about 20 times a year against In Step’s 40 (8h 45m and 8h 55m); Even Step has no shift over 8h 30m Monday to Saturday, and over 8h 30m at all only its Sunday 09:00–18:00, about twice a year each. Its working day moves less from one week to the next than Even Step’s (1h 13m on average, against 1h 31m; In Step’s is 1h 13m too). What it gives up: today’s 13:45, which both the others keep on every weekday; a Saturday closer of 8h 40m, against their 8h 10m; a weaker Saturday fit (12.7, against In Step’s 9.6 and Even Step’s 10.0); the shortest rest of the three, 14h 20m against their 14h 35m (today 12h 30m); and less even weeks, Monday to Saturday (24h 30m to 42h 30m, against In Step’s 25h 30m to 41h 05m and Even Step’s 25h 30m to 41h 30m).</a:t>
             </a:r>
             <a:endParaRPr lang="en-US" dirty="0"/>
           </a:p>
@@ -1546,7 +1546,7 @@
           <a:p>
             <a:r>
               <a:rPr lang="en-US" dirty="0"/>
-              <a:t>Days at work stay at 219 a year (218.6 exactly; Monday to Saturday; Sunday is overtime), under the ceiling set on 1 October 2026. Late finishes average about three more a year each, all of them from the December staffing — three to the close every day, where today has two Monday to Saturday — so no link meeting the same rules on 26 weeks could have fewer. Full weekends off are seven in 26 and never more than five weeks apart; nobody works more than five days in a row on the fixed rota; no week mixes earlies and lates, and 18 of the 21 working weeks keep one shift time. Weekly hours run from 24h 30m to 42h 30m (today 25h 10m to 43h 50m); only the average is the contract. The average shift is about two minutes longer.</a:t>
+              <a:t>Days at work stay at 219 a year (218.6 exactly; Monday to Saturday; Sunday is overtime), under the ceiling set on 1 October 2026. Late finishes average about three more a year each, all of them from the December staffing — three to the close every day, where today has two Monday to Saturday — so no link meeting the same rules on 26 weeks could have fewer. Full weekends off are seven in 26 and never more than five weeks apart; nobody works more than five days in a row on the fixed rota; no week mixes earlies and lates, and 18 of the 21 working weeks keep one shift time. Weekly hours, Monday to Saturday, run from 24h 30m to 42h 30m (today 25h 10m to 43h 50m); only the average is the contract. The average shift is about two minutes longer.</a:t>
             </a:r>
             <a:endParaRPr lang="en-US" dirty="0"/>
           </a:p>
@@ -7632,7 +7632,7 @@
                 <a:ea typeface="Inter" pitchFamily="34" charset="-122"/>
                 <a:cs typeface="Inter" pitchFamily="34" charset="-120"/>
               </a:rPr>
-              <a:t>Four weeks off needs 15 days’ leave, not 14</a:t>
+              <a:t>Four weeks off in a row: 15 days’ leave, not 14</a:t>
             </a:r>
             <a:endParaRPr lang="en-US" sz="1300" dirty="0"/>
           </a:p>

--- a/docs/links-26/presentations/Short-Run-for-managers.pptx
+++ b/docs/links-26/presentations/Short-Run-for-managers.pptx
@@ -1018,7 +1018,7 @@
           <a:p>
             <a:r>
               <a:rPr lang="en-US" dirty="0"/>
-              <a:t>The nine rules are the December 2026 rules, as confirmed verbally on 29 September 2026: at least four at the open, three to the close, five after 22:00, 10 on a Sunday, the ticket office in fixed pairs, two on the floor at all times, handovers, 8–9 hour Sundays and no more shift times than today. Behind them sit three flexible rules that are aimed for when designing but not scored on: 14 on a Saturday, five cover weeks as evenly spaced as 26 weeks allow, and weekday closers starting at 15:45. Short Run meets all three. It also stays under the ceiling of 219 contracted days a year set on 1 October 2026, at 218.6.</a:t>
+              <a:t>The nine rules are the December 2026 rules, as confirmed verbally on 29 September 2026: at least four at the open, three to the close, five after 22:00, 10 on a Sunday, the ticket office in fixed pairs, two on the floor at all times, handovers, 8–9 hour Sundays and no more shift times than today. Behind them sit three flexible rules that are aimed for when designing but not scored on: 14 on a Saturday, five cover weeks as evenly spaced as 26 weeks allow, and weekday closers starting at 15:45 or later. Short Run meets all three. It also stays under the ceiling of 219 contracted days a year set on 1 October 2026, at 218.6.</a:t>
             </a:r>
             <a:endParaRPr lang="en-US" dirty="0"/>
           </a:p>
@@ -1106,7 +1106,7 @@
           <a:p>
             <a:r>
               <a:rPr lang="en-US" dirty="0"/>
-              <a:t>Today’s link meets 4 of the 9 December rules; Short Run meets all 9, and the three flexible ones as well (14 on a Saturday, evenly spaced cover weeks, 15:45 weekday closers). Someone finishing at exactly 22:00 is not counted as still on after 22:00. The floor figure leaves out the ticket office, except its second person at the quiet ends of the day. Three to the close every day is the minimum, and Short Run rosters exactly that, which is what keeps its late finishes down.</a:t>
+              <a:t>Today’s link meets 4 of the 9 December rules; Short Run meets all 9, and the three flexible ones as well (14 on a Saturday, evenly spaced cover weeks, weekday closers from 15:45). Someone finishing at exactly 22:00 is not counted as still on after 22:00. The floor figure leaves out the ticket office, except at the quiet ends of the day, when one of each pair helps on the floor — on a Sunday one early until 09:00, and both lates until 15:00, one of them again from 18:00. Three to the close every day is the minimum, and Short Run rosters exactly that, which is what keeps its late finishes down.</a:t>
             </a:r>
             <a:endParaRPr lang="en-US" dirty="0"/>
           </a:p>
@@ -1458,7 +1458,7 @@
           <a:p>
             <a:r>
               <a:rPr lang="en-US" dirty="0"/>
-              <a:t>This is the case in one slide. It meets every December staffing rule and keeps the shift times people already work wherever that cost little — nine of its fifteen are worked today, and none on a Saturday is new. Nobody works more than five days in a row on the fixed rota, where today it is seven; a cover week placed badly, with its Sunday worked as overtime, can make it seven, never more. Every working week is all earlies or all lates, and 18 of the 21 keep one shift time Monday to Friday; today seven weeks in 16 do both. Its seven full weekends off in 26 weeks are never more than five weeks apart, which is as close as the five cover weeks allow; today it is four in 20, up to seven weeks apart. The honest costs: its new weekday early, 07:00–16:00, is 9 hours, about 20 a year each, where today no early is over 8h 30m; and late finishes, the smallest rise possible — the December staffing needs three to the close every day, and only those three finish after 23:00, so finishes at 23:00 or later go from about 39 to 42 a year each. Its heaviest week is 42h 30m, against today’s 43h 50m. Every closing shift is 30 to 45 minutes shorter. Six shift times are new. It is on the shortlist with In Step (30 October 2026), and against it has the same run, weekends, weeks on one shift time, late finishes and leave. What it has that In Step has not: fewer long days — 28 shifts a year each over 8h 30m against In Step’s 42, its weekday earlies over 8h 30m (all 9h 00m) coming about 20 times a year against In Step’s 40 (8h 45m and 8h 55m) — the closer weekday fit (29.1 against 29.8) and no new Saturday time. What it gives up: today’s 13:45, a Saturday closer of 8h 40m against In Step’s 8h 10m, a weaker Saturday fit (12.7 against 9.6), and less even weeks (24h 30m to 42h 30m, against 25h 30m to 41h 05m).</a:t>
+              <a:t>This is the case in one slide. It meets every December staffing rule and keeps the shift times people already work wherever that cost little — nine of its fifteen are worked today, and none on a Saturday is new. Nobody works more than five days in a row on the fixed rota, where today it is seven; a cover week placed badly, with its Sunday worked as overtime, can make it seven, never more. Every working week is all earlies or all lates, and 18 of the 21 keep one shift time Monday to Friday; today seven weeks in 16 do both. Its seven full weekends off in 26 weeks are never more than five weeks apart, which is as close as the five cover weeks allow; today it is four in 20, up to seven weeks apart. The honest costs: its new weekday early, 07:00–16:00, is 9 hours, about 20 a year each, where today no early is over 8h 30m; and late finishes, the smallest rise possible — the December staffing needs three to the close every day, and only those three finish after 23:00, so finishes at 23:00 or later go from about 39 to 42 a year each. Its heaviest week, Monday to Saturday, is 42h 30m, against today’s 43h 50m. Every closing shift is 30 to 45 minutes shorter. Six shift times are new. It is on the shortlist with Even Step, the recommended design (31 October 2026), and In Step (30 October 2026), and against both has the same run, weekends, weeks on one shift time, late finishes and leave. What it has that neither has: the closest weekday fit to the trains (29.1, against In Step’s 29.8 and Even Step’s 32.6), the shortest weekday lates (8h 00m on average, closers aside, against 8h 12m and 8h 27m) and no new Saturday time. Against In Step it also has fewer long days — 26 shifts a year each over 8h 30m Monday to Saturday against In Step’s 40, its weekday earlies over 8h 30m (all 9h 00m) coming about 20 times a year against In Step’s 40 (8h 45m and 8h 55m); Even Step has no shift over 8h 30m Monday to Saturday, and over 8h 30m at all only its Sunday 09:00–18:00, about twice a year each. Its working day moves less from one week to the next than Even Step’s (1h 13m on average, against 1h 31m; In Step’s is 1h 13m too). What it gives up: today’s 13:45, which both the others keep on every weekday; a Saturday closer of 8h 40m, against their 8h 10m; a weaker Saturday fit (12.7, against In Step’s 9.6 and Even Step’s 10.0); the shortest rest of the three, 14h 20m against their 14h 35m (today 12h 30m); and less even weeks, Monday to Saturday (24h 30m to 42h 30m, against In Step’s 25h 30m to 41h 05m and Even Step’s 25h 30m to 41h 30m).</a:t>
             </a:r>
             <a:endParaRPr lang="en-US" dirty="0"/>
           </a:p>
@@ -1546,7 +1546,7 @@
           <a:p>
             <a:r>
               <a:rPr lang="en-US" dirty="0"/>
-              <a:t>Days at work stay at 219 a year (218.6 exactly; Monday to Saturday; Sunday is overtime), under the ceiling set on 1 October 2026. Late finishes average about three more a year each, all of them from the December staffing — three to the close every day, where today has two Monday to Saturday — so no link meeting the same rules on 26 weeks could have fewer. Full weekends off are seven in 26 and never more than five weeks apart; nobody works more than five days in a row on the fixed rota; no week mixes earlies and lates, and 18 of the 21 working weeks keep one shift time. Weekly hours run from 24h 30m to 42h 30m (today 25h 10m to 43h 50m); only the average is the contract. The average shift is about two minutes longer.</a:t>
+              <a:t>Days at work stay at 219 a year (218.6 exactly; Monday to Saturday; Sunday is overtime), under the ceiling set on 1 October 2026. Late finishes average about three more a year each, all of them from the December staffing — three to the close every day, where today has two Monday to Saturday — so no link meeting the same rules on 26 weeks could have fewer. Full weekends off are seven in 26 and never more than five weeks apart; nobody works more than five days in a row on the fixed rota; no week mixes earlies and lates, and 18 of the 21 working weeks keep one shift time. Weekly hours, Monday to Saturday, run from 24h 30m to 42h 30m (today 25h 10m to 43h 50m); only the average is the contract. The average shift is about two minutes longer.</a:t>
             </a:r>
             <a:endParaRPr lang="en-US" dirty="0"/>
           </a:p>
@@ -2682,7 +2682,7 @@
                 <a:ea typeface="Inter" pitchFamily="34" charset="-122"/>
                 <a:cs typeface="Inter" pitchFamily="34" charset="-120"/>
               </a:rPr>
-              <a:t>today’s link: 4</a:t>
+              <a:t>today 4</a:t>
             </a:r>
             <a:endParaRPr lang="en-US" sz="1300" dirty="0"/>
           </a:p>
@@ -3156,7 +3156,7 @@
                 <a:ea typeface="Inter" pitchFamily="34" charset="-122"/>
                 <a:cs typeface="Inter" pitchFamily="34" charset="-120"/>
               </a:rPr>
-              <a:t>today: 20</a:t>
+              <a:t>today 20</a:t>
             </a:r>
             <a:endParaRPr lang="en-US" sz="1300" dirty="0"/>
           </a:p>
@@ -3515,7 +3515,7 @@
                 <a:ea typeface="Inter" pitchFamily="34" charset="-122"/>
                 <a:cs typeface="Inter" pitchFamily="34" charset="-120"/>
               </a:rPr>
-              <a:t>On duty during the day</a:t>
+              <a:t>On duty each day</a:t>
             </a:r>
             <a:endParaRPr lang="en-US" sz="1400" dirty="0"/>
           </a:p>
@@ -4708,11 +4708,11 @@
         <p:spPr>
           <a:xfrm>
             <a:off x="457200" y="1801368"/>
-            <a:ext cx="8229600" cy="365760"/>
+            <a:ext cx="8229600" cy="461176"/>
           </a:xfrm>
           <a:prstGeom prst="roundRect">
             <a:avLst>
-              <a:gd name="adj" fmla="val 11538"/>
+              <a:gd name="adj" fmla="val 9151"/>
             </a:avLst>
           </a:prstGeom>
           <a:solidFill>
@@ -4735,7 +4735,7 @@
         <p:spPr>
           <a:xfrm>
             <a:off x="640080" y="1801368"/>
-            <a:ext cx="4023360" cy="365760"/>
+            <a:ext cx="4023360" cy="461176"/>
           </a:xfrm>
           <a:prstGeom prst="rect">
             <a:avLst/>
@@ -4774,7 +4774,7 @@
         <p:spPr>
           <a:xfrm>
             <a:off x="4663440" y="1801368"/>
-            <a:ext cx="2011680" cy="365760"/>
+            <a:ext cx="2011680" cy="461176"/>
           </a:xfrm>
           <a:prstGeom prst="rect">
             <a:avLst/>
@@ -4813,7 +4813,7 @@
         <p:spPr>
           <a:xfrm>
             <a:off x="6675120" y="1801368"/>
-            <a:ext cx="2011680" cy="365760"/>
+            <a:ext cx="2011680" cy="461176"/>
           </a:xfrm>
           <a:prstGeom prst="rect">
             <a:avLst/>
@@ -4851,12 +4851,12 @@
         </p:nvSpPr>
         <p:spPr>
           <a:xfrm>
-            <a:off x="457200" y="2240280"/>
-            <a:ext cx="8229600" cy="365760"/>
+            <a:off x="457200" y="2354779"/>
+            <a:ext cx="8229600" cy="461176"/>
           </a:xfrm>
           <a:prstGeom prst="roundRect">
             <a:avLst>
-              <a:gd name="adj" fmla="val 11538"/>
+              <a:gd name="adj" fmla="val 9151"/>
             </a:avLst>
           </a:prstGeom>
           <a:solidFill>
@@ -4878,8 +4878,8 @@
         </p:nvSpPr>
         <p:spPr>
           <a:xfrm>
-            <a:off x="640080" y="2240280"/>
-            <a:ext cx="4023360" cy="365760"/>
+            <a:off x="640080" y="2354779"/>
+            <a:ext cx="4023360" cy="461176"/>
           </a:xfrm>
           <a:prstGeom prst="rect">
             <a:avLst/>
@@ -4917,8 +4917,8 @@
         </p:nvSpPr>
         <p:spPr>
           <a:xfrm>
-            <a:off x="4663440" y="2240280"/>
-            <a:ext cx="2011680" cy="365760"/>
+            <a:off x="4663440" y="2354779"/>
+            <a:ext cx="2011680" cy="461176"/>
           </a:xfrm>
           <a:prstGeom prst="rect">
             <a:avLst/>
@@ -4956,8 +4956,8 @@
         </p:nvSpPr>
         <p:spPr>
           <a:xfrm>
-            <a:off x="6675120" y="2240280"/>
-            <a:ext cx="2011680" cy="365760"/>
+            <a:off x="6675120" y="2354779"/>
+            <a:ext cx="2011680" cy="461176"/>
           </a:xfrm>
           <a:prstGeom prst="rect">
             <a:avLst/>
@@ -4995,12 +4995,12 @@
         </p:nvSpPr>
         <p:spPr>
           <a:xfrm>
-            <a:off x="457200" y="2679192"/>
-            <a:ext cx="8229600" cy="365760"/>
+            <a:off x="457200" y="2908190"/>
+            <a:ext cx="8229600" cy="461176"/>
           </a:xfrm>
           <a:prstGeom prst="roundRect">
             <a:avLst>
-              <a:gd name="adj" fmla="val 11538"/>
+              <a:gd name="adj" fmla="val 9151"/>
             </a:avLst>
           </a:prstGeom>
           <a:solidFill>
@@ -5022,8 +5022,8 @@
         </p:nvSpPr>
         <p:spPr>
           <a:xfrm>
-            <a:off x="640080" y="2679192"/>
-            <a:ext cx="4023360" cy="365760"/>
+            <a:off x="640080" y="2908190"/>
+            <a:ext cx="4023360" cy="461176"/>
           </a:xfrm>
           <a:prstGeom prst="rect">
             <a:avLst/>
@@ -5061,8 +5061,8 @@
         </p:nvSpPr>
         <p:spPr>
           <a:xfrm>
-            <a:off x="4663440" y="2679192"/>
-            <a:ext cx="2011680" cy="365760"/>
+            <a:off x="4663440" y="2908190"/>
+            <a:ext cx="2011680" cy="461176"/>
           </a:xfrm>
           <a:prstGeom prst="rect">
             <a:avLst/>
@@ -5100,8 +5100,8 @@
         </p:nvSpPr>
         <p:spPr>
           <a:xfrm>
-            <a:off x="6675120" y="2679192"/>
-            <a:ext cx="2011680" cy="365760"/>
+            <a:off x="6675120" y="2908190"/>
+            <a:ext cx="2011680" cy="461176"/>
           </a:xfrm>
           <a:prstGeom prst="rect">
             <a:avLst/>
@@ -5139,12 +5139,12 @@
         </p:nvSpPr>
         <p:spPr>
           <a:xfrm>
-            <a:off x="457200" y="3118104"/>
-            <a:ext cx="8229600" cy="365760"/>
+            <a:off x="457200" y="3461601"/>
+            <a:ext cx="8229600" cy="461176"/>
           </a:xfrm>
           <a:prstGeom prst="roundRect">
             <a:avLst>
-              <a:gd name="adj" fmla="val 11538"/>
+              <a:gd name="adj" fmla="val 9151"/>
             </a:avLst>
           </a:prstGeom>
           <a:solidFill>
@@ -5166,8 +5166,8 @@
         </p:nvSpPr>
         <p:spPr>
           <a:xfrm>
-            <a:off x="640080" y="3118104"/>
-            <a:ext cx="4023360" cy="365760"/>
+            <a:off x="640080" y="3461601"/>
+            <a:ext cx="4023360" cy="461176"/>
           </a:xfrm>
           <a:prstGeom prst="rect">
             <a:avLst/>
@@ -5205,8 +5205,8 @@
         </p:nvSpPr>
         <p:spPr>
           <a:xfrm>
-            <a:off x="4663440" y="3118104"/>
-            <a:ext cx="2011680" cy="365760"/>
+            <a:off x="4663440" y="3461601"/>
+            <a:ext cx="2011680" cy="461176"/>
           </a:xfrm>
           <a:prstGeom prst="rect">
             <a:avLst/>
@@ -5244,8 +5244,8 @@
         </p:nvSpPr>
         <p:spPr>
           <a:xfrm>
-            <a:off x="6675120" y="3118104"/>
-            <a:ext cx="2011680" cy="365760"/>
+            <a:off x="6675120" y="3461601"/>
+            <a:ext cx="2011680" cy="461176"/>
           </a:xfrm>
           <a:prstGeom prst="rect">
             <a:avLst/>
@@ -5577,11 +5577,11 @@
         <p:spPr>
           <a:xfrm>
             <a:off x="457200" y="1801368"/>
-            <a:ext cx="8229600" cy="365760"/>
+            <a:ext cx="8229600" cy="461176"/>
           </a:xfrm>
           <a:prstGeom prst="roundRect">
             <a:avLst>
-              <a:gd name="adj" fmla="val 11538"/>
+              <a:gd name="adj" fmla="val 9151"/>
             </a:avLst>
           </a:prstGeom>
           <a:solidFill>
@@ -5604,7 +5604,7 @@
         <p:spPr>
           <a:xfrm>
             <a:off x="640080" y="1801368"/>
-            <a:ext cx="4023360" cy="365760"/>
+            <a:ext cx="4023360" cy="461176"/>
           </a:xfrm>
           <a:prstGeom prst="rect">
             <a:avLst/>
@@ -5643,7 +5643,7 @@
         <p:spPr>
           <a:xfrm>
             <a:off x="4663440" y="1801368"/>
-            <a:ext cx="2011680" cy="365760"/>
+            <a:ext cx="2011680" cy="461176"/>
           </a:xfrm>
           <a:prstGeom prst="rect">
             <a:avLst/>
@@ -5682,7 +5682,7 @@
         <p:spPr>
           <a:xfrm>
             <a:off x="6675120" y="1801368"/>
-            <a:ext cx="2011680" cy="365760"/>
+            <a:ext cx="2011680" cy="461176"/>
           </a:xfrm>
           <a:prstGeom prst="rect">
             <a:avLst/>
@@ -5720,12 +5720,12 @@
         </p:nvSpPr>
         <p:spPr>
           <a:xfrm>
-            <a:off x="457200" y="2240280"/>
-            <a:ext cx="8229600" cy="365760"/>
+            <a:off x="457200" y="2354779"/>
+            <a:ext cx="8229600" cy="461176"/>
           </a:xfrm>
           <a:prstGeom prst="roundRect">
             <a:avLst>
-              <a:gd name="adj" fmla="val 11538"/>
+              <a:gd name="adj" fmla="val 9151"/>
             </a:avLst>
           </a:prstGeom>
           <a:solidFill>
@@ -5747,8 +5747,8 @@
         </p:nvSpPr>
         <p:spPr>
           <a:xfrm>
-            <a:off x="640080" y="2240280"/>
-            <a:ext cx="4023360" cy="365760"/>
+            <a:off x="640080" y="2354779"/>
+            <a:ext cx="4023360" cy="461176"/>
           </a:xfrm>
           <a:prstGeom prst="rect">
             <a:avLst/>
@@ -5786,8 +5786,8 @@
         </p:nvSpPr>
         <p:spPr>
           <a:xfrm>
-            <a:off x="4663440" y="2240280"/>
-            <a:ext cx="2011680" cy="365760"/>
+            <a:off x="4663440" y="2354779"/>
+            <a:ext cx="2011680" cy="461176"/>
           </a:xfrm>
           <a:prstGeom prst="rect">
             <a:avLst/>
@@ -5825,8 +5825,8 @@
         </p:nvSpPr>
         <p:spPr>
           <a:xfrm>
-            <a:off x="6675120" y="2240280"/>
-            <a:ext cx="2011680" cy="365760"/>
+            <a:off x="6675120" y="2354779"/>
+            <a:ext cx="2011680" cy="461176"/>
           </a:xfrm>
           <a:prstGeom prst="rect">
             <a:avLst/>
@@ -5864,12 +5864,12 @@
         </p:nvSpPr>
         <p:spPr>
           <a:xfrm>
-            <a:off x="457200" y="2679192"/>
-            <a:ext cx="8229600" cy="365760"/>
+            <a:off x="457200" y="2908190"/>
+            <a:ext cx="8229600" cy="461176"/>
           </a:xfrm>
           <a:prstGeom prst="roundRect">
             <a:avLst>
-              <a:gd name="adj" fmla="val 11538"/>
+              <a:gd name="adj" fmla="val 9151"/>
             </a:avLst>
           </a:prstGeom>
           <a:solidFill>
@@ -5891,8 +5891,8 @@
         </p:nvSpPr>
         <p:spPr>
           <a:xfrm>
-            <a:off x="640080" y="2679192"/>
-            <a:ext cx="4023360" cy="365760"/>
+            <a:off x="640080" y="2908190"/>
+            <a:ext cx="4023360" cy="461176"/>
           </a:xfrm>
           <a:prstGeom prst="rect">
             <a:avLst/>
@@ -5930,8 +5930,8 @@
         </p:nvSpPr>
         <p:spPr>
           <a:xfrm>
-            <a:off x="4663440" y="2679192"/>
-            <a:ext cx="2011680" cy="365760"/>
+            <a:off x="4663440" y="2908190"/>
+            <a:ext cx="2011680" cy="461176"/>
           </a:xfrm>
           <a:prstGeom prst="rect">
             <a:avLst/>
@@ -5969,8 +5969,8 @@
         </p:nvSpPr>
         <p:spPr>
           <a:xfrm>
-            <a:off x="6675120" y="2679192"/>
-            <a:ext cx="2011680" cy="365760"/>
+            <a:off x="6675120" y="2908190"/>
+            <a:ext cx="2011680" cy="461176"/>
           </a:xfrm>
           <a:prstGeom prst="rect">
             <a:avLst/>
@@ -6008,12 +6008,12 @@
         </p:nvSpPr>
         <p:spPr>
           <a:xfrm>
-            <a:off x="457200" y="3118104"/>
-            <a:ext cx="8229600" cy="365760"/>
+            <a:off x="457200" y="3461601"/>
+            <a:ext cx="8229600" cy="461176"/>
           </a:xfrm>
           <a:prstGeom prst="roundRect">
             <a:avLst>
-              <a:gd name="adj" fmla="val 11538"/>
+              <a:gd name="adj" fmla="val 9151"/>
             </a:avLst>
           </a:prstGeom>
           <a:solidFill>
@@ -6035,8 +6035,8 @@
         </p:nvSpPr>
         <p:spPr>
           <a:xfrm>
-            <a:off x="640080" y="3118104"/>
-            <a:ext cx="4023360" cy="365760"/>
+            <a:off x="640080" y="3461601"/>
+            <a:ext cx="4023360" cy="461176"/>
           </a:xfrm>
           <a:prstGeom prst="rect">
             <a:avLst/>
@@ -6074,8 +6074,8 @@
         </p:nvSpPr>
         <p:spPr>
           <a:xfrm>
-            <a:off x="4663440" y="3118104"/>
-            <a:ext cx="2011680" cy="365760"/>
+            <a:off x="4663440" y="3461601"/>
+            <a:ext cx="2011680" cy="461176"/>
           </a:xfrm>
           <a:prstGeom prst="rect">
             <a:avLst/>
@@ -6113,8 +6113,8 @@
         </p:nvSpPr>
         <p:spPr>
           <a:xfrm>
-            <a:off x="6675120" y="3118104"/>
-            <a:ext cx="2011680" cy="365760"/>
+            <a:off x="6675120" y="3461601"/>
+            <a:ext cx="2011680" cy="461176"/>
           </a:xfrm>
           <a:prstGeom prst="rect">
             <a:avLst/>
@@ -6353,7 +6353,7 @@
                 <a:ea typeface="Inter" pitchFamily="34" charset="-122"/>
                 <a:cs typeface="Inter" pitchFamily="34" charset="-120"/>
               </a:rPr>
-              <a:t>What both shortlisted links give, what this one adds, and what it costs</a:t>
+              <a:t>What all three shortlisted links give, what this one adds, and what it costs</a:t>
             </a:r>
             <a:endParaRPr lang="en-US" sz="1500" dirty="0"/>
           </a:p>
@@ -6456,7 +6456,7 @@
                 <a:ea typeface="Inter" pitchFamily="34" charset="-122"/>
                 <a:cs typeface="Inter" pitchFamily="34" charset="-120"/>
               </a:rPr>
-              <a:t>Both shortlisted: all 9 December rules; no avoidable fatigue warning, fixed rota</a:t>
+              <a:t>All three shortlisted: all 9 December rules; no avoidable fatigue warning, fixed rota</a:t>
             </a:r>
             <a:endParaRPr lang="en-US" sz="1500" dirty="0"/>
           </a:p>
@@ -6559,7 +6559,7 @@
                 <a:ea typeface="Inter" pitchFamily="34" charset="-122"/>
                 <a:cs typeface="Inter" pitchFamily="34" charset="-120"/>
               </a:rPr>
-              <a:t>Both shortlisted: about 14 full weekends off a year (today 10), at most 5 apart</a:t>
+              <a:t>All three shortlisted: 14 full weekends off a year (today 10), at most 5 weeks apart</a:t>
             </a:r>
             <a:endParaRPr lang="en-US" sz="1500" dirty="0"/>
           </a:p>
@@ -6662,7 +6662,7 @@
                 <a:ea typeface="Inter" pitchFamily="34" charset="-122"/>
                 <a:cs typeface="Inter" pitchFamily="34" charset="-120"/>
               </a:rPr>
-              <a:t>Both shortlisted: no shift over 9 hours, and every closing shift shorter</a:t>
+              <a:t>All three shortlisted: no shift over 9 hours, and every closing shift shorter</a:t>
             </a:r>
             <a:endParaRPr lang="en-US" sz="1500" dirty="0"/>
           </a:p>
@@ -6765,7 +6765,7 @@
                 <a:ea typeface="Inter" pitchFamily="34" charset="-122"/>
                 <a:cs typeface="Inter" pitchFamily="34" charset="-120"/>
               </a:rPr>
-              <a:t>This one adds: half the long earlies, a closer weekday fit, no new Saturday time</a:t>
+              <a:t>This one adds: the closest weekday fit, and no new Saturday time</a:t>
             </a:r>
             <a:endParaRPr lang="en-US" sz="1500" dirty="0"/>
           </a:p>
@@ -6868,7 +6868,7 @@
                 <a:ea typeface="Inter" pitchFamily="34" charset="-122"/>
                 <a:cs typeface="Inter" pitchFamily="34" charset="-120"/>
               </a:rPr>
-              <a:t>9 of 15 shift times worked today; 6 new, four shorter versions of today’s lates</a:t>
+              <a:t>9 of 15 shift times worked today; 6 new, 4 of them shorter versions of today’s lates</a:t>
             </a:r>
             <a:endParaRPr lang="en-US" sz="1500" dirty="0"/>
           </a:p>
@@ -6971,7 +6971,7 @@
                 <a:ea typeface="Inter" pitchFamily="34" charset="-122"/>
                 <a:cs typeface="Inter" pitchFamily="34" charset="-120"/>
               </a:rPr>
-              <a:t>Costs: 20 weekday earlies a year over 8h 30m; four weeks off 15 days, not 14</a:t>
+              <a:t>This one costs: an 8h 40m Saturday closer, and the heaviest week, 42h 30m</a:t>
             </a:r>
             <a:endParaRPr lang="en-US" sz="1500" dirty="0"/>
           </a:p>
@@ -7037,7 +7037,7 @@
                 <a:ea typeface="Inter" pitchFamily="34" charset="-122"/>
                 <a:cs typeface="Inter" pitchFamily="34" charset="-120"/>
               </a:rPr>
-              <a:t>Late finishes: 42 a year each (today 39) — the rules’ minimum. The colleague deck shows every cost openly.</a:t>
+              <a:t>All three: two more Saturdays a year, four weeks off for 15 days’ leave, and late finishes — 42 a year at 23:00 or later (today 39), 94 at 22:00 or later (today 78).</a:t>
             </a:r>
             <a:endParaRPr lang="en-US" sz="1400" dirty="0"/>
           </a:p>
@@ -7544,7 +7544,7 @@
                 <a:ea typeface="Inter" pitchFamily="34" charset="-122"/>
                 <a:cs typeface="Inter" pitchFamily="34" charset="-120"/>
               </a:rPr>
-              <a:t>Late finishes: 42 a year (today 39)</a:t>
+              <a:t>Late finishes: 42 a year at 23:00 or later (today 39), 94 at 22:00 or later (today 78)</a:t>
             </a:r>
             <a:endParaRPr lang="en-US" sz="1300" dirty="0"/>
           </a:p>
@@ -7610,7 +7610,7 @@
                 <a:ea typeface="Inter" pitchFamily="34" charset="-122"/>
                 <a:cs typeface="Inter" pitchFamily="34" charset="-120"/>
               </a:rPr>
-              <a:t>Best 14-day leave stretch 28 days, not 30</a:t>
+              <a:t>14 days’ leave: at best 28 days off, not 30</a:t>
             </a:r>
             <a:endParaRPr lang="en-US" sz="1300" dirty="0"/>
           </a:p>
@@ -7632,7 +7632,7 @@
                 <a:ea typeface="Inter" pitchFamily="34" charset="-122"/>
                 <a:cs typeface="Inter" pitchFamily="34" charset="-120"/>
               </a:rPr>
-              <a:t>Four weeks off needs 15 days’ leave, not 14</a:t>
+              <a:t>Four weeks off in a row: 15 days’ leave, not 14</a:t>
             </a:r>
             <a:endParaRPr lang="en-US" sz="1300" dirty="0"/>
           </a:p>
@@ -7847,7 +7847,7 @@
                 <a:ea typeface="Inter" pitchFamily="34" charset="-122"/>
                 <a:cs typeface="Inter" pitchFamily="34" charset="-120"/>
               </a:rPr>
-              <a:t>Three things confirmed verbally, two decisions left, two points still open</a:t>
+              <a:t>Three things settled, two decisions left, two points still open</a:t>
             </a:r>
             <a:endParaRPr lang="en-US" sz="1500" dirty="0"/>
           </a:p>
